--- a/PSCONF26_Payette_Leveraging_Braid.pptx
+++ b/PSCONF26_Payette_Leveraging_Braid.pptx
@@ -397,7 +397,7 @@
           <a:p>
             <a:fld id="{69440670-43D7-400A-ABC5-B69E064DBB37}" type="datetimeFigureOut">
               <a:rPr lang="en-GB" smtClean="0"/>
-              <a:t>23/05/2026</a:t>
+              <a:t>30/05/2026</a:t>
             </a:fld>
             <a:endParaRPr lang="en-GB"/>
           </a:p>
@@ -574,7 +574,7 @@
           <a:p>
             <a:fld id="{611B03A4-75C9-4E3D-9183-2102CA9AEC33}" type="datetimeFigureOut">
               <a:rPr lang="en-GB" smtClean="0"/>
-              <a:t>23/05/2026</a:t>
+              <a:t>30/05/2026</a:t>
             </a:fld>
             <a:endParaRPr lang="en-GB"/>
           </a:p>
@@ -1495,7 +1495,7 @@
           <a:bodyPr/>
           <a:lstStyle/>
           <a:p>
-            <a:endParaRPr lang="en-GB"/>
+            <a:endParaRPr lang="en-GB" dirty="0"/>
           </a:p>
         </p:txBody>
       </p:sp>
@@ -6082,14 +6082,21 @@
             <p:ph type="title"/>
           </p:nvPr>
         </p:nvSpPr>
-        <p:spPr/>
+        <p:spPr>
+          <a:xfrm>
+            <a:off x="838200" y="107739"/>
+            <a:ext cx="9733280" cy="1325563"/>
+          </a:xfrm>
+        </p:spPr>
         <p:txBody>
-          <a:bodyPr/>
+          <a:bodyPr>
+            <a:normAutofit/>
+          </a:bodyPr>
           <a:lstStyle/>
           <a:p>
             <a:r>
-              <a:rPr lang="en-US" dirty="0"/>
-              <a:t>Why bother?</a:t>
+              <a:rPr lang="en-US" sz="4000" dirty="0"/>
+              <a:t>Why Braid?</a:t>
             </a:r>
           </a:p>
         </p:txBody>
@@ -6110,7 +6117,12 @@
             <p:ph idx="1"/>
           </p:nvPr>
         </p:nvSpPr>
-        <p:spPr/>
+        <p:spPr>
+          <a:xfrm>
+            <a:off x="838200" y="1433301"/>
+            <a:ext cx="10515600" cy="5265525"/>
+          </a:xfrm>
+        </p:spPr>
         <p:txBody>
           <a:bodyPr>
             <a:normAutofit/>
@@ -6119,13 +6131,13 @@
           <a:p>
             <a:r>
               <a:rPr lang="en-US" dirty="0"/>
-              <a:t>Exploration of some alternate ideas for an object-based shell.</a:t>
+              <a:t>Goal: to explore some alternate ideas for an object-based shell.</a:t>
             </a:r>
           </a:p>
           <a:p>
             <a:r>
               <a:rPr lang="en-US" dirty="0"/>
-              <a:t>Braid is generally faster and more efficient than PowerShell so there’s that:</a:t>
+              <a:t>Practically Braid is generally faster and more efficient than PowerShell so there’s that:</a:t>
             </a:r>
           </a:p>
           <a:p>
@@ -6191,7 +6203,7 @@
           <a:p>
             <a:r>
               <a:rPr lang="en-US" dirty="0"/>
-              <a:t>It’s much easier to deal with nested collections of data</a:t>
+              <a:t>It’s also much easier to deal with nested collections of data</a:t>
             </a:r>
           </a:p>
           <a:p>
@@ -6250,7 +6262,7 @@
         </p:nvSpPr>
         <p:spPr>
           <a:xfrm>
-            <a:off x="838200" y="0"/>
+            <a:off x="770467" y="-106364"/>
             <a:ext cx="9733280" cy="1325563"/>
           </a:xfrm>
         </p:spPr>
@@ -6261,7 +6273,7 @@
           <a:lstStyle/>
           <a:p>
             <a:r>
-              <a:rPr lang="en-US" dirty="0"/>
+              <a:rPr lang="en-US" sz="4000" dirty="0"/>
               <a:t>Utilities in the PSBraid.ps1 Script</a:t>
             </a:r>
           </a:p>
@@ -6285,8 +6297,8 @@
         </p:nvSpPr>
         <p:spPr>
           <a:xfrm>
-            <a:off x="838200" y="1149531"/>
-            <a:ext cx="10515600" cy="5477692"/>
+            <a:off x="838200" y="1219199"/>
+            <a:ext cx="8773160" cy="5408023"/>
           </a:xfrm>
         </p:spPr>
         <p:txBody>
@@ -6318,6 +6330,226 @@
           </a:p>
           <a:p>
             <a:r>
+              <a:rPr lang="en-US" dirty="0"/>
+              <a:t>Get-</a:t>
+            </a:r>
+            <a:r>
+              <a:rPr lang="en-US" dirty="0" err="1"/>
+              <a:t>BraidSymbol</a:t>
+            </a:r>
+            <a:r>
+              <a:rPr lang="en-US" dirty="0"/>
+              <a:t> (</a:t>
+            </a:r>
+            <a:r>
+              <a:rPr lang="en-US" dirty="0" err="1"/>
+              <a:t>gbs</a:t>
+            </a:r>
+            <a:r>
+              <a:rPr lang="en-US" dirty="0"/>
+              <a:t>)</a:t>
+            </a:r>
+          </a:p>
+          <a:p>
+            <a:r>
+              <a:rPr lang="en-US" dirty="0"/>
+              <a:t>Get-</a:t>
+            </a:r>
+            <a:r>
+              <a:rPr lang="en-US" dirty="0" err="1"/>
+              <a:t>BraidFunction</a:t>
+            </a:r>
+            <a:r>
+              <a:rPr lang="en-US" dirty="0"/>
+              <a:t> (</a:t>
+            </a:r>
+            <a:r>
+              <a:rPr lang="en-US" dirty="0" err="1"/>
+              <a:t>gbf</a:t>
+            </a:r>
+            <a:r>
+              <a:rPr lang="en-US" dirty="0"/>
+              <a:t>)</a:t>
+            </a:r>
+          </a:p>
+          <a:p>
+            <a:r>
+              <a:rPr lang="en-US" dirty="0"/>
+              <a:t>Invoke-</a:t>
+            </a:r>
+            <a:r>
+              <a:rPr lang="en-US" dirty="0" err="1"/>
+              <a:t>BraidFunction</a:t>
+            </a:r>
+            <a:r>
+              <a:rPr lang="en-US" dirty="0"/>
+              <a:t> (</a:t>
+            </a:r>
+            <a:r>
+              <a:rPr lang="en-US" dirty="0" err="1"/>
+              <a:t>ibf</a:t>
+            </a:r>
+            <a:r>
+              <a:rPr lang="en-US" dirty="0"/>
+              <a:t>)</a:t>
+            </a:r>
+          </a:p>
+          <a:p>
+            <a:r>
+              <a:rPr lang="en-US" dirty="0"/>
+              <a:t>New-</a:t>
+            </a:r>
+            <a:r>
+              <a:rPr lang="en-US" dirty="0" err="1"/>
+              <a:t>BraidLambda</a:t>
+            </a:r>
+            <a:r>
+              <a:rPr lang="en-US" dirty="0"/>
+              <a:t> (</a:t>
+            </a:r>
+            <a:r>
+              <a:rPr lang="en-US" dirty="0" err="1"/>
+              <a:t>nbl</a:t>
+            </a:r>
+            <a:r>
+              <a:rPr lang="en-US" dirty="0"/>
+              <a:t>)</a:t>
+            </a:r>
+          </a:p>
+          <a:p>
+            <a:r>
+              <a:rPr lang="en-US" dirty="0"/>
+              <a:t>New-</a:t>
+            </a:r>
+            <a:r>
+              <a:rPr lang="en-US" dirty="0" err="1"/>
+              <a:t>BraidFunction</a:t>
+            </a:r>
+            <a:r>
+              <a:rPr lang="en-US" dirty="0"/>
+              <a:t> (</a:t>
+            </a:r>
+            <a:r>
+              <a:rPr lang="en-US" dirty="0" err="1"/>
+              <a:t>nbf</a:t>
+            </a:r>
+            <a:r>
+              <a:rPr lang="en-US" dirty="0"/>
+              <a:t>)</a:t>
+            </a:r>
+          </a:p>
+          <a:p>
+            <a:r>
+              <a:rPr lang="en-US" dirty="0"/>
+              <a:t>New-</a:t>
+            </a:r>
+            <a:r>
+              <a:rPr lang="en-US" dirty="0" err="1"/>
+              <a:t>BraidExpression</a:t>
+            </a:r>
+            <a:r>
+              <a:rPr lang="en-US" dirty="0"/>
+              <a:t> (</a:t>
+            </a:r>
+            <a:r>
+              <a:rPr lang="en-US" dirty="0" err="1"/>
+              <a:t>nbe</a:t>
+            </a:r>
+            <a:r>
+              <a:rPr lang="en-US" dirty="0"/>
+              <a:t>)</a:t>
+            </a:r>
+          </a:p>
+          <a:p>
+            <a:r>
+              <a:rPr lang="en-US" dirty="0"/>
+              <a:t>Invoke-</a:t>
+            </a:r>
+            <a:r>
+              <a:rPr lang="en-US" dirty="0" err="1"/>
+              <a:t>BraidExpression</a:t>
+            </a:r>
+            <a:r>
+              <a:rPr lang="en-US" dirty="0"/>
+              <a:t> (</a:t>
+            </a:r>
+            <a:r>
+              <a:rPr lang="en-US" dirty="0" err="1"/>
+              <a:t>ibe</a:t>
+            </a:r>
+            <a:r>
+              <a:rPr lang="en-US" dirty="0"/>
+              <a:t>)</a:t>
+            </a:r>
+          </a:p>
+          <a:p>
+            <a:r>
+              <a:rPr lang="en-US" dirty="0"/>
+              <a:t>New-</a:t>
+            </a:r>
+            <a:r>
+              <a:rPr lang="en-US" dirty="0" err="1"/>
+              <a:t>BraidPipeExpression</a:t>
+            </a:r>
+            <a:r>
+              <a:rPr lang="en-US" dirty="0"/>
+              <a:t> (</a:t>
+            </a:r>
+            <a:r>
+              <a:rPr lang="en-US" dirty="0" err="1"/>
+              <a:t>nbpe</a:t>
+            </a:r>
+            <a:r>
+              <a:rPr lang="en-US" dirty="0"/>
+              <a:t>)</a:t>
+            </a:r>
+          </a:p>
+          <a:p>
+            <a:r>
+              <a:rPr lang="en-US" dirty="0"/>
+              <a:t>Get-</a:t>
+            </a:r>
+            <a:r>
+              <a:rPr lang="en-US" dirty="0" err="1"/>
+              <a:t>BraidVariableValue</a:t>
+            </a:r>
+            <a:r>
+              <a:rPr lang="en-US" dirty="0"/>
+              <a:t> (</a:t>
+            </a:r>
+            <a:r>
+              <a:rPr lang="en-US" dirty="0" err="1"/>
+              <a:t>gbvv</a:t>
+            </a:r>
+            <a:r>
+              <a:rPr lang="en-US" dirty="0"/>
+              <a:t>)</a:t>
+            </a:r>
+          </a:p>
+          <a:p>
+            <a:r>
+              <a:rPr lang="en-US" dirty="0"/>
+              <a:t>Set-</a:t>
+            </a:r>
+            <a:r>
+              <a:rPr lang="en-US" dirty="0" err="1"/>
+              <a:t>BraidVariableValue</a:t>
+            </a:r>
+            <a:r>
+              <a:rPr lang="en-US" dirty="0"/>
+              <a:t> (</a:t>
+            </a:r>
+            <a:r>
+              <a:rPr lang="en-US" dirty="0" err="1"/>
+              <a:t>sbvv</a:t>
+            </a:r>
+            <a:r>
+              <a:rPr lang="en-US" dirty="0"/>
+              <a:t>)</a:t>
+            </a:r>
+          </a:p>
+          <a:p>
+            <a:r>
               <a:rPr lang="en-US" dirty="0" err="1"/>
               <a:t>ConvertFrom-BraidSourceText</a:t>
             </a:r>
@@ -6335,224 +6567,7 @@
             </a:r>
           </a:p>
           <a:p>
-            <a:r>
-              <a:rPr lang="en-US" dirty="0"/>
-              <a:t>Get-</a:t>
-            </a:r>
-            <a:r>
-              <a:rPr lang="en-US" dirty="0" err="1"/>
-              <a:t>BraidFunction</a:t>
-            </a:r>
-            <a:r>
-              <a:rPr lang="en-US" dirty="0"/>
-              <a:t> (</a:t>
-            </a:r>
-            <a:r>
-              <a:rPr lang="en-US" dirty="0" err="1"/>
-              <a:t>gbf</a:t>
-            </a:r>
-            <a:r>
-              <a:rPr lang="en-US" dirty="0"/>
-              <a:t>)</a:t>
-            </a:r>
-          </a:p>
-          <a:p>
-            <a:r>
-              <a:rPr lang="en-US" dirty="0"/>
-              <a:t>Get-</a:t>
-            </a:r>
-            <a:r>
-              <a:rPr lang="en-US" dirty="0" err="1"/>
-              <a:t>BraidSymbol</a:t>
-            </a:r>
-            <a:r>
-              <a:rPr lang="en-US" dirty="0"/>
-              <a:t> (</a:t>
-            </a:r>
-            <a:r>
-              <a:rPr lang="en-US" dirty="0" err="1"/>
-              <a:t>gbs</a:t>
-            </a:r>
-            <a:r>
-              <a:rPr lang="en-US" dirty="0"/>
-              <a:t>)</a:t>
-            </a:r>
-          </a:p>
-          <a:p>
-            <a:r>
-              <a:rPr lang="en-US" dirty="0"/>
-              <a:t>Get-</a:t>
-            </a:r>
-            <a:r>
-              <a:rPr lang="en-US" dirty="0" err="1"/>
-              <a:t>BraidVariableValue</a:t>
-            </a:r>
-            <a:r>
-              <a:rPr lang="en-US" dirty="0"/>
-              <a:t> (</a:t>
-            </a:r>
-            <a:r>
-              <a:rPr lang="en-US" dirty="0" err="1"/>
-              <a:t>gbvv</a:t>
-            </a:r>
-            <a:r>
-              <a:rPr lang="en-US" dirty="0"/>
-              <a:t>)</a:t>
-            </a:r>
-          </a:p>
-          <a:p>
-            <a:r>
-              <a:rPr lang="en-US" dirty="0"/>
-              <a:t>Invoke-</a:t>
-            </a:r>
-            <a:r>
-              <a:rPr lang="en-US" dirty="0" err="1"/>
-              <a:t>BraidExpression</a:t>
-            </a:r>
-            <a:r>
-              <a:rPr lang="en-US" dirty="0"/>
-              <a:t> (</a:t>
-            </a:r>
-            <a:r>
-              <a:rPr lang="en-US" dirty="0" err="1"/>
-              <a:t>ibe</a:t>
-            </a:r>
-            <a:r>
-              <a:rPr lang="en-US" dirty="0"/>
-              <a:t>)</a:t>
-            </a:r>
-          </a:p>
-          <a:p>
-            <a:r>
-              <a:rPr lang="en-US" dirty="0"/>
-              <a:t>Invoke-</a:t>
-            </a:r>
-            <a:r>
-              <a:rPr lang="en-US" dirty="0" err="1"/>
-              <a:t>BraidFunction</a:t>
-            </a:r>
-            <a:r>
-              <a:rPr lang="en-US" dirty="0"/>
-              <a:t> (</a:t>
-            </a:r>
-            <a:r>
-              <a:rPr lang="en-US" dirty="0" err="1"/>
-              <a:t>ibf</a:t>
-            </a:r>
-            <a:r>
-              <a:rPr lang="en-US" dirty="0"/>
-              <a:t>)</a:t>
-            </a:r>
-          </a:p>
-          <a:p>
-            <a:r>
-              <a:rPr lang="en-US" dirty="0"/>
-              <a:t>New-</a:t>
-            </a:r>
-            <a:r>
-              <a:rPr lang="en-US" dirty="0" err="1"/>
-              <a:t>BraidExpression</a:t>
-            </a:r>
-            <a:r>
-              <a:rPr lang="en-US" dirty="0"/>
-              <a:t> (</a:t>
-            </a:r>
-            <a:r>
-              <a:rPr lang="en-US" dirty="0" err="1"/>
-              <a:t>nbe</a:t>
-            </a:r>
-            <a:r>
-              <a:rPr lang="en-US" dirty="0"/>
-              <a:t>)</a:t>
-            </a:r>
-          </a:p>
-          <a:p>
-            <a:r>
-              <a:rPr lang="en-US" dirty="0"/>
-              <a:t>New-</a:t>
-            </a:r>
-            <a:r>
-              <a:rPr lang="en-US" dirty="0" err="1"/>
-              <a:t>BraidFunction</a:t>
-            </a:r>
-            <a:r>
-              <a:rPr lang="en-US" dirty="0"/>
-              <a:t> (</a:t>
-            </a:r>
-            <a:r>
-              <a:rPr lang="en-US" dirty="0" err="1"/>
-              <a:t>nbf</a:t>
-            </a:r>
-            <a:r>
-              <a:rPr lang="en-US" dirty="0"/>
-              <a:t>)</a:t>
-            </a:r>
-          </a:p>
-          <a:p>
-            <a:r>
-              <a:rPr lang="en-US" dirty="0"/>
-              <a:t>New-</a:t>
-            </a:r>
-            <a:r>
-              <a:rPr lang="en-US" dirty="0" err="1"/>
-              <a:t>BraidLambda</a:t>
-            </a:r>
-            <a:r>
-              <a:rPr lang="en-US" dirty="0"/>
-              <a:t> (</a:t>
-            </a:r>
-            <a:r>
-              <a:rPr lang="en-US" dirty="0" err="1"/>
-              <a:t>nbl</a:t>
-            </a:r>
-            <a:r>
-              <a:rPr lang="en-US" dirty="0"/>
-              <a:t>)</a:t>
-            </a:r>
-          </a:p>
-          <a:p>
-            <a:r>
-              <a:rPr lang="en-US" dirty="0"/>
-              <a:t>New-</a:t>
-            </a:r>
-            <a:r>
-              <a:rPr lang="en-US" dirty="0" err="1"/>
-              <a:t>BraidPipeExpression</a:t>
-            </a:r>
-            <a:r>
-              <a:rPr lang="en-US" dirty="0"/>
-              <a:t> (</a:t>
-            </a:r>
-            <a:r>
-              <a:rPr lang="en-US" dirty="0" err="1"/>
-              <a:t>nbpe</a:t>
-            </a:r>
-            <a:r>
-              <a:rPr lang="en-US" dirty="0"/>
-              <a:t>)</a:t>
-            </a:r>
-          </a:p>
-          <a:p>
-            <a:r>
-              <a:rPr lang="en-US" dirty="0"/>
-              <a:t>Set-</a:t>
-            </a:r>
-            <a:r>
-              <a:rPr lang="en-US" dirty="0" err="1"/>
-              <a:t>BraidVariableValue</a:t>
-            </a:r>
-            <a:r>
-              <a:rPr lang="en-US" dirty="0"/>
-              <a:t> (</a:t>
-            </a:r>
-            <a:r>
-              <a:rPr lang="en-US" dirty="0" err="1"/>
-              <a:t>sbvv</a:t>
-            </a:r>
-            <a:r>
-              <a:rPr lang="en-US" dirty="0"/>
-              <a:t>)</a:t>
-            </a:r>
+            <a:endParaRPr lang="en-US" dirty="0"/>
           </a:p>
         </p:txBody>
       </p:sp>
@@ -6610,14 +6625,16 @@
         </p:nvSpPr>
         <p:spPr/>
         <p:txBody>
-          <a:bodyPr/>
+          <a:bodyPr>
+            <a:normAutofit/>
+          </a:bodyPr>
           <a:lstStyle/>
           <a:p>
             <a:r>
-              <a:rPr lang="fr-FR" dirty="0"/>
+              <a:rPr lang="fr-FR" sz="4000" dirty="0"/>
               <a:t>Braid Highlights</a:t>
             </a:r>
-            <a:endParaRPr lang="en-GB" dirty="0"/>
+            <a:endParaRPr lang="en-GB" sz="4000" dirty="0"/>
           </a:p>
         </p:txBody>
       </p:sp>
@@ -6685,18 +6702,18 @@
             </a:r>
             <a:r>
               <a:rPr lang="en-US" b="1" i="1" dirty="0"/>
-              <a:t>Symbols</a:t>
+              <a:t>symbols</a:t>
             </a:r>
             <a:r>
               <a:rPr lang="en-US" dirty="0"/>
-              <a:t> which serve the purpose of PowerShell variables</a:t>
+              <a:t> which serve the purpose of variable names</a:t>
             </a:r>
           </a:p>
           <a:p>
             <a:pPr lvl="1"/>
             <a:r>
               <a:rPr lang="en-US" dirty="0"/>
-              <a:t>Symbols have associated values (bindings) which can also be functions.</a:t>
+              <a:t>Symbols have associated values (bindings) which can be values or functions.</a:t>
             </a:r>
           </a:p>
           <a:p>
@@ -6987,11 +7004,13 @@
           </a:xfrm>
         </p:spPr>
         <p:txBody>
-          <a:bodyPr/>
+          <a:bodyPr>
+            <a:normAutofit/>
+          </a:bodyPr>
           <a:lstStyle/>
           <a:p>
             <a:r>
-              <a:rPr lang="en-US" dirty="0"/>
+              <a:rPr lang="en-US" sz="4000" dirty="0"/>
               <a:t>Core Braid Literal Data Types</a:t>
             </a:r>
           </a:p>
@@ -7021,40 +7040,40 @@
         </p:spPr>
         <p:txBody>
           <a:bodyPr>
-            <a:normAutofit lnSpcReduction="10000"/>
+            <a:normAutofit/>
           </a:bodyPr>
           <a:lstStyle/>
           <a:p>
             <a:r>
-              <a:rPr lang="en-US" sz="4000" i="1" dirty="0"/>
+              <a:rPr lang="en-US" i="1" dirty="0"/>
               <a:t>Symbols</a:t>
             </a:r>
             <a:r>
-              <a:rPr lang="en-US" sz="4000" dirty="0"/>
+              <a:rPr lang="en-US" dirty="0"/>
               <a:t>: atomic interned object, evaluate to their bindings</a:t>
             </a:r>
           </a:p>
           <a:p>
             <a:r>
-              <a:rPr lang="en-US" sz="4000" i="1" dirty="0"/>
+              <a:rPr lang="en-US" i="1" dirty="0"/>
               <a:t>Keywords</a:t>
             </a:r>
             <a:r>
-              <a:rPr lang="en-US" sz="4000" dirty="0"/>
+              <a:rPr lang="en-US" dirty="0"/>
               <a:t>: atomic interned objects, evaluate to themselves</a:t>
             </a:r>
           </a:p>
           <a:p>
             <a:r>
-              <a:rPr lang="en-US" sz="4000" i="1" dirty="0"/>
+              <a:rPr lang="en-US" i="1" dirty="0"/>
               <a:t>Numbers</a:t>
             </a:r>
             <a:r>
-              <a:rPr lang="en-US" sz="4000" dirty="0"/>
+              <a:rPr lang="en-US" dirty="0"/>
               <a:t>: including ^</a:t>
             </a:r>
             <a:r>
-              <a:rPr lang="en-US" sz="3200" dirty="0" err="1">
+              <a:rPr lang="en-US" sz="2800" dirty="0" err="1">
                 <a:solidFill>
                   <a:schemeClr val="accent1"/>
                 </a:solidFill>
@@ -7064,11 +7083,11 @@
               <a:t>BigInteger</a:t>
             </a:r>
             <a:r>
-              <a:rPr lang="en-US" sz="4000" dirty="0"/>
+              <a:rPr lang="en-US" dirty="0"/>
               <a:t> and ^</a:t>
             </a:r>
             <a:r>
-              <a:rPr lang="en-US" sz="3200" dirty="0" err="1">
+              <a:rPr lang="en-US" sz="2800" dirty="0" err="1">
                 <a:solidFill>
                   <a:schemeClr val="accent1"/>
                 </a:solidFill>
@@ -7077,7 +7096,7 @@
               </a:rPr>
               <a:t>BigDecimal</a:t>
             </a:r>
-            <a:endParaRPr lang="en-US" sz="3200" dirty="0">
+            <a:endParaRPr lang="en-US" sz="2800" dirty="0">
               <a:solidFill>
                 <a:schemeClr val="accent1"/>
               </a:solidFill>
@@ -7087,25 +7106,25 @@
           </a:p>
           <a:p>
             <a:r>
-              <a:rPr lang="en-US" sz="4000" i="1" dirty="0"/>
+              <a:rPr lang="en-US" i="1" dirty="0"/>
               <a:t>Strings</a:t>
             </a:r>
             <a:r>
-              <a:rPr lang="en-US" sz="4000" dirty="0"/>
-              <a:t>: with interpolation and quotes</a:t>
-            </a:r>
-          </a:p>
-          <a:p>
-            <a:r>
-              <a:rPr lang="en-US" sz="4000" i="1" dirty="0"/>
+              <a:rPr lang="en-US" dirty="0"/>
+              <a:t>: double quoted with interpolation</a:t>
+            </a:r>
+          </a:p>
+          <a:p>
+            <a:r>
+              <a:rPr lang="en-US" i="1" dirty="0"/>
               <a:t>Types</a:t>
             </a:r>
             <a:r>
-              <a:rPr lang="en-US" sz="4000" dirty="0"/>
+              <a:rPr lang="en-US" dirty="0"/>
               <a:t>: notation is </a:t>
             </a:r>
             <a:r>
-              <a:rPr lang="en-US" sz="3200" dirty="0">
+              <a:rPr lang="en-US" sz="2800" dirty="0">
                 <a:solidFill>
                   <a:schemeClr val="accent1"/>
                 </a:solidFill>
@@ -7115,11 +7134,11 @@
               <a:t>^int</a:t>
             </a:r>
             <a:r>
-              <a:rPr lang="en-US" sz="4000" dirty="0"/>
+              <a:rPr lang="en-US" dirty="0"/>
               <a:t>, </a:t>
             </a:r>
             <a:r>
-              <a:rPr lang="en-US" sz="3200" dirty="0">
+              <a:rPr lang="en-US" sz="2800" dirty="0">
                 <a:solidFill>
                   <a:schemeClr val="accent1"/>
                 </a:solidFill>
@@ -7131,12 +7150,12 @@
           </a:p>
           <a:p>
             <a:r>
-              <a:rPr lang="en-US" sz="4000" i="1" dirty="0"/>
+              <a:rPr lang="en-US" i="1" dirty="0"/>
               <a:t>Lists</a:t>
             </a:r>
             <a:r>
-              <a:rPr lang="en-US" sz="4000" dirty="0"/>
-              <a:t>: singly-linked, data and code</a:t>
+              <a:rPr lang="en-US" dirty="0"/>
+              <a:t>: singly-linked lists for data and code</a:t>
             </a:r>
           </a:p>
         </p:txBody>
@@ -7194,11 +7213,13 @@
           </a:xfrm>
         </p:spPr>
         <p:txBody>
-          <a:bodyPr/>
+          <a:bodyPr>
+            <a:normAutofit/>
+          </a:bodyPr>
           <a:lstStyle/>
           <a:p>
             <a:r>
-              <a:rPr lang="en-US" dirty="0"/>
+              <a:rPr lang="en-US" sz="4000" dirty="0"/>
               <a:t>Core Braid Data Types (cont’d)</a:t>
             </a:r>
           </a:p>
@@ -7243,12 +7264,8 @@
           </a:p>
           <a:p>
             <a:r>
-              <a:rPr lang="en-US" sz="4000" i="1" dirty="0" err="1"/>
-              <a:t>Seqences</a:t>
-            </a:r>
-            <a:r>
               <a:rPr lang="en-US" sz="4000" i="1" dirty="0"/>
-              <a:t> - </a:t>
+              <a:t>Sequences - </a:t>
             </a:r>
             <a:r>
               <a:rPr lang="en-US" sz="3500" dirty="0">
@@ -7356,7 +7373,7 @@
             </a:r>
             <a:r>
               <a:rPr lang="en-US" sz="4000" dirty="0"/>
-              <a:t>: built-ins, user functions, pattern functions, collections, regex, PowerShell commands, executables, scripts</a:t>
+              <a:t>: built-ins, user functions, pattern functions, special forms, collections, regex, PowerShell commands, executables, scripts</a:t>
             </a:r>
           </a:p>
           <a:p>
@@ -7523,31 +7540,31 @@
               <a:buNone/>
             </a:pPr>
             <a:r>
-              <a:rPr lang="en-US" sz="2600" b="1" dirty="0" err="1">
-                <a:latin typeface="Cascadia Code" panose="020B0609020000020004" pitchFamily="49" charset="0"/>
-                <a:cs typeface="Cascadia Code" panose="020B0609020000020004" pitchFamily="49" charset="0"/>
-              </a:rPr>
-              <a:t>ibf</a:t>
-            </a:r>
-            <a:r>
-              <a:rPr lang="en-US" sz="2600" b="1" dirty="0">
-                <a:latin typeface="Cascadia Code" panose="020B0609020000020004" pitchFamily="49" charset="0"/>
-                <a:cs typeface="Cascadia Code" panose="020B0609020000020004" pitchFamily="49" charset="0"/>
-              </a:rPr>
-              <a:t> symbol hi </a:t>
-            </a:r>
-            <a:r>
               <a:rPr lang="en-US" sz="2600" dirty="0">
                 <a:latin typeface="Cascadia Code" panose="020B0609020000020004" pitchFamily="49" charset="0"/>
                 <a:cs typeface="Cascadia Code" panose="020B0609020000020004" pitchFamily="49" charset="0"/>
               </a:rPr>
-              <a:t># get or create the symbol “hi”</a:t>
+              <a:t>Get-</a:t>
+            </a:r>
+            <a:r>
+              <a:rPr lang="en-US" sz="2600" dirty="0" err="1">
+                <a:latin typeface="Cascadia Code" panose="020B0609020000020004" pitchFamily="49" charset="0"/>
+                <a:cs typeface="Cascadia Code" panose="020B0609020000020004" pitchFamily="49" charset="0"/>
+              </a:rPr>
+              <a:t>BraidSymbol</a:t>
+            </a:r>
+            <a:r>
+              <a:rPr lang="en-US" sz="2600" dirty="0">
+                <a:latin typeface="Cascadia Code" panose="020B0609020000020004" pitchFamily="49" charset="0"/>
+                <a:cs typeface="Cascadia Code" panose="020B0609020000020004" pitchFamily="49" charset="0"/>
+              </a:rPr>
+              <a:t> hi # get or create the symbol “hi”</a:t>
             </a:r>
           </a:p>
           <a:p>
             <a:r>
               <a:rPr lang="en-US" dirty="0"/>
-              <a:t>This annoying when accessing Braid from PowerShell so there are functions to help with this:</a:t>
+              <a:t>This issue is annoying when accessing Braid from PowerShell so there are functions to help with this:</a:t>
             </a:r>
           </a:p>
           <a:p>
@@ -7725,7 +7742,7 @@
         <p:spPr/>
         <p:txBody>
           <a:bodyPr>
-            <a:normAutofit/>
+            <a:normAutofit lnSpcReduction="10000"/>
           </a:bodyPr>
           <a:lstStyle/>
           <a:p>
@@ -7767,6 +7784,9 @@
               <a:lnSpc>
                 <a:spcPct val="150000"/>
               </a:lnSpc>
+              <a:spcBef>
+                <a:spcPts val="0"/>
+              </a:spcBef>
               <a:buNone/>
             </a:pPr>
             <a:r>
@@ -7805,6 +7825,9 @@
               <a:lnSpc>
                 <a:spcPct val="150000"/>
               </a:lnSpc>
+              <a:spcBef>
+                <a:spcPts val="0"/>
+              </a:spcBef>
               <a:buNone/>
             </a:pPr>
             <a:r>
@@ -7843,6 +7866,9 @@
               <a:lnSpc>
                 <a:spcPct val="150000"/>
               </a:lnSpc>
+              <a:spcBef>
+                <a:spcPts val="0"/>
+              </a:spcBef>
               <a:buNone/>
             </a:pPr>
             <a:r>
@@ -7854,6 +7880,148 @@
                 <a:cs typeface="Cascadia Code" panose="020B0609020000020004" pitchFamily="49" charset="0"/>
               </a:rPr>
               <a:t>("+" 1 2 3)</a:t>
+            </a:r>
+          </a:p>
+          <a:p>
+            <a:pPr marL="0" indent="0">
+              <a:lnSpc>
+                <a:spcPct val="150000"/>
+              </a:lnSpc>
+              <a:spcBef>
+                <a:spcPts val="0"/>
+              </a:spcBef>
+              <a:buNone/>
+            </a:pPr>
+            <a:r>
+              <a:rPr lang="en-US" sz="2400" dirty="0">
+                <a:solidFill>
+                  <a:schemeClr val="accent1"/>
+                </a:solidFill>
+                <a:latin typeface="Cascadia Code" panose="020B0609020000020004" pitchFamily="49" charset="0"/>
+                <a:cs typeface="Cascadia Code" panose="020B0609020000020004" pitchFamily="49" charset="0"/>
+              </a:rPr>
+              <a:t>PS&gt; (</a:t>
+            </a:r>
+            <a:r>
+              <a:rPr lang="en-US" sz="2400" dirty="0" err="1">
+                <a:solidFill>
+                  <a:schemeClr val="accent1"/>
+                </a:solidFill>
+                <a:latin typeface="Cascadia Code" panose="020B0609020000020004" pitchFamily="49" charset="0"/>
+                <a:cs typeface="Cascadia Code" panose="020B0609020000020004" pitchFamily="49" charset="0"/>
+              </a:rPr>
+              <a:t>gbf</a:t>
+            </a:r>
+            <a:r>
+              <a:rPr lang="en-US" sz="2400" dirty="0">
+                <a:solidFill>
+                  <a:schemeClr val="accent1"/>
+                </a:solidFill>
+                <a:latin typeface="Cascadia Code" panose="020B0609020000020004" pitchFamily="49" charset="0"/>
+                <a:cs typeface="Cascadia Code" panose="020B0609020000020004" pitchFamily="49" charset="0"/>
+              </a:rPr>
+              <a:t> </a:t>
+            </a:r>
+            <a:r>
+              <a:rPr lang="en-US" sz="2400" dirty="0" err="1">
+                <a:solidFill>
+                  <a:schemeClr val="accent1"/>
+                </a:solidFill>
+                <a:latin typeface="Cascadia Code" panose="020B0609020000020004" pitchFamily="49" charset="0"/>
+                <a:cs typeface="Cascadia Code" panose="020B0609020000020004" pitchFamily="49" charset="0"/>
+              </a:rPr>
+              <a:t>sqr</a:t>
+            </a:r>
+            <a:r>
+              <a:rPr lang="en-US" sz="2400" dirty="0">
+                <a:solidFill>
+                  <a:schemeClr val="accent1"/>
+                </a:solidFill>
+                <a:latin typeface="Cascadia Code" panose="020B0609020000020004" pitchFamily="49" charset="0"/>
+                <a:cs typeface="Cascadia Code" panose="020B0609020000020004" pitchFamily="49" charset="0"/>
+              </a:rPr>
+              <a:t>).</a:t>
+            </a:r>
+            <a:r>
+              <a:rPr lang="en-US" sz="2400" dirty="0" err="1">
+                <a:solidFill>
+                  <a:schemeClr val="accent1"/>
+                </a:solidFill>
+                <a:latin typeface="Cascadia Code" panose="020B0609020000020004" pitchFamily="49" charset="0"/>
+                <a:cs typeface="Cascadia Code" panose="020B0609020000020004" pitchFamily="49" charset="0"/>
+              </a:rPr>
+              <a:t>ToString</a:t>
+            </a:r>
+            <a:r>
+              <a:rPr lang="en-US" sz="2400" dirty="0">
+                <a:solidFill>
+                  <a:schemeClr val="accent1"/>
+                </a:solidFill>
+                <a:latin typeface="Cascadia Code" panose="020B0609020000020004" pitchFamily="49" charset="0"/>
+                <a:cs typeface="Cascadia Code" panose="020B0609020000020004" pitchFamily="49" charset="0"/>
+              </a:rPr>
+              <a:t>()</a:t>
+            </a:r>
+          </a:p>
+          <a:p>
+            <a:pPr marL="0" indent="0">
+              <a:lnSpc>
+                <a:spcPct val="150000"/>
+              </a:lnSpc>
+              <a:spcBef>
+                <a:spcPts val="0"/>
+              </a:spcBef>
+              <a:buNone/>
+            </a:pPr>
+            <a:r>
+              <a:rPr lang="en-US" sz="2400" dirty="0">
+                <a:solidFill>
+                  <a:schemeClr val="accent1"/>
+                </a:solidFill>
+                <a:latin typeface="Cascadia Code" panose="020B0609020000020004" pitchFamily="49" charset="0"/>
+                <a:cs typeface="Cascadia Code" panose="020B0609020000020004" pitchFamily="49" charset="0"/>
+              </a:rPr>
+              <a:t>(</a:t>
+            </a:r>
+            <a:r>
+              <a:rPr lang="en-US" sz="2400" dirty="0" err="1">
+                <a:solidFill>
+                  <a:schemeClr val="accent1"/>
+                </a:solidFill>
+                <a:latin typeface="Cascadia Code" panose="020B0609020000020004" pitchFamily="49" charset="0"/>
+                <a:cs typeface="Cascadia Code" panose="020B0609020000020004" pitchFamily="49" charset="0"/>
+              </a:rPr>
+              <a:t>defn</a:t>
+            </a:r>
+            <a:r>
+              <a:rPr lang="en-US" sz="2400" dirty="0">
+                <a:solidFill>
+                  <a:schemeClr val="accent1"/>
+                </a:solidFill>
+                <a:latin typeface="Cascadia Code" panose="020B0609020000020004" pitchFamily="49" charset="0"/>
+                <a:cs typeface="Cascadia Code" panose="020B0609020000020004" pitchFamily="49" charset="0"/>
+              </a:rPr>
+              <a:t> </a:t>
+            </a:r>
+            <a:r>
+              <a:rPr lang="en-US" sz="2400" dirty="0" err="1">
+                <a:solidFill>
+                  <a:schemeClr val="accent1"/>
+                </a:solidFill>
+                <a:latin typeface="Cascadia Code" panose="020B0609020000020004" pitchFamily="49" charset="0"/>
+                <a:cs typeface="Cascadia Code" panose="020B0609020000020004" pitchFamily="49" charset="0"/>
+              </a:rPr>
+              <a:t>sqr</a:t>
+            </a:r>
+            <a:r>
+              <a:rPr lang="en-US" sz="2400" dirty="0">
+                <a:solidFill>
+                  <a:schemeClr val="accent1"/>
+                </a:solidFill>
+                <a:latin typeface="Cascadia Code" panose="020B0609020000020004" pitchFamily="49" charset="0"/>
+                <a:cs typeface="Cascadia Code" panose="020B0609020000020004" pitchFamily="49" charset="0"/>
+              </a:rPr>
+              <a:t> [number] (* number number))</a:t>
             </a:r>
           </a:p>
           <a:p>
@@ -7958,19 +8126,12 @@
           <a:lstStyle/>
           <a:p>
             <a:r>
-              <a:rPr lang="en-US" sz="6500" dirty="0"/>
-              <a:t>On Windows, PowerShell uses ‘\’ for paths and ‘`’ for quoting.</a:t>
-            </a:r>
-          </a:p>
-          <a:p>
-            <a:pPr lvl="1"/>
-            <a:r>
-              <a:rPr lang="en-US" sz="5100" dirty="0"/>
-              <a:t>People complain about ‘`’ </a:t>
-            </a:r>
-            <a:r>
-              <a:rPr lang="en-US" sz="5100" i="1" dirty="0"/>
-              <a:t>a lot</a:t>
+              <a:rPr lang="en-US" sz="5800" dirty="0"/>
+              <a:t>On Windows, PowerShell uses ‘\’ for paths and ‘`’ for quoting. (People complain about ‘`’ </a:t>
+            </a:r>
+            <a:r>
+              <a:rPr lang="en-US" sz="5800" i="1" dirty="0"/>
+              <a:t>a lot)</a:t>
             </a:r>
           </a:p>
           <a:p>
@@ -7997,7 +8158,24 @@
                 <a:latin typeface="Cascadia Code" panose="020B0609020000020004" pitchFamily="49" charset="0"/>
                 <a:cs typeface="Cascadia Code" panose="020B0609020000020004" pitchFamily="49" charset="0"/>
               </a:rPr>
-              <a:t>“hello ${name}” ; double quoted w string interpolation</a:t>
+              <a:t>"hello ${name}</a:t>
+            </a:r>
+            <a:r>
+              <a:rPr lang="en-US" sz="3600" dirty="0">
+                <a:solidFill>
+                  <a:schemeClr val="accent1"/>
+                </a:solidFill>
+                <a:latin typeface="Cascadia Code" panose="020B0609020000020004" pitchFamily="49" charset="0"/>
+                <a:cs typeface="Cascadia Code" panose="020B0609020000020004" pitchFamily="49" charset="0"/>
+              </a:rPr>
+              <a:t>"</a:t>
+            </a:r>
+            <a:r>
+              <a:rPr lang="en-US" sz="3600" dirty="0">
+                <a:latin typeface="Cascadia Code" panose="020B0609020000020004" pitchFamily="49" charset="0"/>
+                <a:cs typeface="Cascadia Code" panose="020B0609020000020004" pitchFamily="49" charset="0"/>
+              </a:rPr>
+              <a:t> ; double quoted w string interpolation</a:t>
             </a:r>
           </a:p>
           <a:p>
@@ -8012,7 +8190,7 @@
                 <a:latin typeface="Cascadia Code" panose="020B0609020000020004" pitchFamily="49" charset="0"/>
                 <a:cs typeface="Cascadia Code" panose="020B0609020000020004" pitchFamily="49" charset="0"/>
               </a:rPr>
-              <a:t>@“foo\bat.txt”  ; @ quoted – no special processing</a:t>
+              <a:t>@"foo\bat.txt"  ; @ quoted – no special processing</a:t>
             </a:r>
           </a:p>
           <a:p>
@@ -8027,7 +8205,7 @@
                 <a:latin typeface="Cascadia Code" panose="020B0609020000020004" pitchFamily="49" charset="0"/>
                 <a:cs typeface="Cascadia Code" panose="020B0609020000020004" pitchFamily="49" charset="0"/>
               </a:rPr>
-              <a:t>“”” “quotes”    ; triple-quotes can contain quotes</a:t>
+              <a:t>""" "quotes"    ; triple-quotes can contain quotes</a:t>
             </a:r>
           </a:p>
           <a:p>
@@ -8039,11 +8217,18 @@
             </a:pPr>
             <a:r>
               <a:rPr lang="en-US" sz="3600" dirty="0">
-                <a:latin typeface="Cascadia Code" panose="020B0609020000020004" pitchFamily="49" charset="0"/>
-                <a:cs typeface="Cascadia Code" panose="020B0609020000020004" pitchFamily="49" charset="0"/>
-              </a:rPr>
-              <a:t>”””</a:t>
-            </a:r>
+                <a:solidFill>
+                  <a:schemeClr val="accent1"/>
+                </a:solidFill>
+                <a:latin typeface="Cascadia Code" panose="020B0609020000020004" pitchFamily="49" charset="0"/>
+                <a:cs typeface="Cascadia Code" panose="020B0609020000020004" pitchFamily="49" charset="0"/>
+              </a:rPr>
+              <a:t>"""</a:t>
+            </a:r>
+            <a:endParaRPr lang="en-US" sz="3600" dirty="0">
+              <a:latin typeface="Cascadia Code" panose="020B0609020000020004" pitchFamily="49" charset="0"/>
+              <a:cs typeface="Cascadia Code" panose="020B0609020000020004" pitchFamily="49" charset="0"/>
+            </a:endParaRPr>
           </a:p>
         </p:txBody>
       </p:sp>
@@ -8142,7 +8327,75 @@
                 <a:latin typeface="Cascadia Code" panose="020B0609020000020004" pitchFamily="49" charset="0"/>
                 <a:cs typeface="Cascadia Code" panose="020B0609020000020004" pitchFamily="49" charset="0"/>
               </a:rPr>
-              <a:t>(#”^[a-z][a-z0-9]*” “a string”) ; returns fail</a:t>
+              <a:t>(#</a:t>
+            </a:r>
+            <a:r>
+              <a:rPr lang="en-US" sz="2400" dirty="0">
+                <a:solidFill>
+                  <a:schemeClr val="accent1"/>
+                </a:solidFill>
+                <a:latin typeface="Cascadia Code" panose="020B0609020000020004" pitchFamily="49" charset="0"/>
+                <a:cs typeface="Cascadia Code" panose="020B0609020000020004" pitchFamily="49" charset="0"/>
+              </a:rPr>
+              <a:t>"</a:t>
+            </a:r>
+            <a:r>
+              <a:rPr lang="en-US" sz="2400" dirty="0">
+                <a:latin typeface="Cascadia Code" panose="020B0609020000020004" pitchFamily="49" charset="0"/>
+                <a:cs typeface="Cascadia Code" panose="020B0609020000020004" pitchFamily="49" charset="0"/>
+              </a:rPr>
+              <a:t>^[a-z][a-z0-9]*</a:t>
+            </a:r>
+            <a:r>
+              <a:rPr lang="en-US" sz="2400" dirty="0">
+                <a:solidFill>
+                  <a:schemeClr val="accent1"/>
+                </a:solidFill>
+                <a:latin typeface="Cascadia Code" panose="020B0609020000020004" pitchFamily="49" charset="0"/>
+                <a:cs typeface="Cascadia Code" panose="020B0609020000020004" pitchFamily="49" charset="0"/>
+              </a:rPr>
+              <a:t>"</a:t>
+            </a:r>
+            <a:r>
+              <a:rPr lang="en-US" sz="2400" dirty="0">
+                <a:latin typeface="Cascadia Code" panose="020B0609020000020004" pitchFamily="49" charset="0"/>
+                <a:cs typeface="Cascadia Code" panose="020B0609020000020004" pitchFamily="49" charset="0"/>
+              </a:rPr>
+              <a:t> </a:t>
+            </a:r>
+            <a:r>
+              <a:rPr lang="en-US" sz="2400" dirty="0">
+                <a:solidFill>
+                  <a:schemeClr val="accent1"/>
+                </a:solidFill>
+                <a:latin typeface="Cascadia Code" panose="020B0609020000020004" pitchFamily="49" charset="0"/>
+                <a:cs typeface="Cascadia Code" panose="020B0609020000020004" pitchFamily="49" charset="0"/>
+              </a:rPr>
+              <a:t>"</a:t>
+            </a:r>
+            <a:r>
+              <a:rPr lang="en-US" sz="2400" dirty="0">
+                <a:latin typeface="Cascadia Code" panose="020B0609020000020004" pitchFamily="49" charset="0"/>
+                <a:cs typeface="Cascadia Code" panose="020B0609020000020004" pitchFamily="49" charset="0"/>
+              </a:rPr>
+              <a:t>a string</a:t>
+            </a:r>
+            <a:r>
+              <a:rPr lang="en-US" sz="2400" dirty="0">
+                <a:solidFill>
+                  <a:schemeClr val="accent1"/>
+                </a:solidFill>
+                <a:latin typeface="Cascadia Code" panose="020B0609020000020004" pitchFamily="49" charset="0"/>
+                <a:cs typeface="Cascadia Code" panose="020B0609020000020004" pitchFamily="49" charset="0"/>
+              </a:rPr>
+              <a:t>"</a:t>
+            </a:r>
+            <a:r>
+              <a:rPr lang="en-US" sz="2400" dirty="0">
+                <a:latin typeface="Cascadia Code" panose="020B0609020000020004" pitchFamily="49" charset="0"/>
+                <a:cs typeface="Cascadia Code" panose="020B0609020000020004" pitchFamily="49" charset="0"/>
+              </a:rPr>
+              <a:t>) ; returns fail</a:t>
             </a:r>
           </a:p>
           <a:p>
@@ -8213,7 +8466,109 @@
                 <a:latin typeface="Cascadia Code" panose="020B0609020000020004" pitchFamily="49" charset="0"/>
                 <a:cs typeface="Cascadia Code" panose="020B0609020000020004" pitchFamily="49" charset="0"/>
               </a:rPr>
-              <a:t>({“a” 1 “b” 2} “b”) ; returns 2</a:t>
+              <a:t>({</a:t>
+            </a:r>
+            <a:r>
+              <a:rPr lang="en-US" sz="2400" dirty="0">
+                <a:solidFill>
+                  <a:schemeClr val="accent1"/>
+                </a:solidFill>
+                <a:latin typeface="Cascadia Code" panose="020B0609020000020004" pitchFamily="49" charset="0"/>
+                <a:cs typeface="Cascadia Code" panose="020B0609020000020004" pitchFamily="49" charset="0"/>
+              </a:rPr>
+              <a:t>"</a:t>
+            </a:r>
+            <a:r>
+              <a:rPr lang="en-US" sz="2400" dirty="0">
+                <a:latin typeface="Cascadia Code" panose="020B0609020000020004" pitchFamily="49" charset="0"/>
+                <a:cs typeface="Cascadia Code" panose="020B0609020000020004" pitchFamily="49" charset="0"/>
+              </a:rPr>
+              <a:t>a</a:t>
+            </a:r>
+            <a:r>
+              <a:rPr lang="en-US" sz="2400" dirty="0">
+                <a:solidFill>
+                  <a:schemeClr val="accent1"/>
+                </a:solidFill>
+                <a:latin typeface="Cascadia Code" panose="020B0609020000020004" pitchFamily="49" charset="0"/>
+                <a:cs typeface="Cascadia Code" panose="020B0609020000020004" pitchFamily="49" charset="0"/>
+              </a:rPr>
+              <a:t>"</a:t>
+            </a:r>
+            <a:r>
+              <a:rPr lang="en-US" sz="2400" dirty="0">
+                <a:latin typeface="Cascadia Code" panose="020B0609020000020004" pitchFamily="49" charset="0"/>
+                <a:cs typeface="Cascadia Code" panose="020B0609020000020004" pitchFamily="49" charset="0"/>
+              </a:rPr>
+              <a:t> 1 </a:t>
+            </a:r>
+            <a:r>
+              <a:rPr lang="en-US" sz="2400" dirty="0">
+                <a:solidFill>
+                  <a:schemeClr val="accent1"/>
+                </a:solidFill>
+                <a:latin typeface="Cascadia Code" panose="020B0609020000020004" pitchFamily="49" charset="0"/>
+                <a:cs typeface="Cascadia Code" panose="020B0609020000020004" pitchFamily="49" charset="0"/>
+              </a:rPr>
+              <a:t>"</a:t>
+            </a:r>
+            <a:r>
+              <a:rPr lang="en-US" sz="2400" dirty="0">
+                <a:latin typeface="Cascadia Code" panose="020B0609020000020004" pitchFamily="49" charset="0"/>
+                <a:cs typeface="Cascadia Code" panose="020B0609020000020004" pitchFamily="49" charset="0"/>
+              </a:rPr>
+              <a:t>b</a:t>
+            </a:r>
+            <a:r>
+              <a:rPr lang="en-US" sz="2400" dirty="0">
+                <a:solidFill>
+                  <a:schemeClr val="accent1"/>
+                </a:solidFill>
+                <a:latin typeface="Cascadia Code" panose="020B0609020000020004" pitchFamily="49" charset="0"/>
+                <a:cs typeface="Cascadia Code" panose="020B0609020000020004" pitchFamily="49" charset="0"/>
+              </a:rPr>
+              <a:t>"</a:t>
+            </a:r>
+            <a:r>
+              <a:rPr lang="en-US" sz="2400" dirty="0">
+                <a:latin typeface="Cascadia Code" panose="020B0609020000020004" pitchFamily="49" charset="0"/>
+                <a:cs typeface="Cascadia Code" panose="020B0609020000020004" pitchFamily="49" charset="0"/>
+              </a:rPr>
+              <a:t> 2} </a:t>
+            </a:r>
+            <a:r>
+              <a:rPr lang="en-US" sz="2400" dirty="0">
+                <a:solidFill>
+                  <a:schemeClr val="accent1"/>
+                </a:solidFill>
+                <a:latin typeface="Cascadia Code" panose="020B0609020000020004" pitchFamily="49" charset="0"/>
+                <a:cs typeface="Cascadia Code" panose="020B0609020000020004" pitchFamily="49" charset="0"/>
+              </a:rPr>
+              <a:t>"</a:t>
+            </a:r>
+            <a:r>
+              <a:rPr lang="en-US" sz="2400" dirty="0">
+                <a:latin typeface="Cascadia Code" panose="020B0609020000020004" pitchFamily="49" charset="0"/>
+                <a:cs typeface="Cascadia Code" panose="020B0609020000020004" pitchFamily="49" charset="0"/>
+              </a:rPr>
+              <a:t>b</a:t>
+            </a:r>
+            <a:r>
+              <a:rPr lang="en-US" sz="2400" dirty="0">
+                <a:solidFill>
+                  <a:schemeClr val="accent1"/>
+                </a:solidFill>
+                <a:latin typeface="Cascadia Code" panose="020B0609020000020004" pitchFamily="49" charset="0"/>
+                <a:cs typeface="Cascadia Code" panose="020B0609020000020004" pitchFamily="49" charset="0"/>
+              </a:rPr>
+              <a:t>"</a:t>
+            </a:r>
+            <a:r>
+              <a:rPr lang="en-US" sz="2400" dirty="0">
+                <a:latin typeface="Cascadia Code" panose="020B0609020000020004" pitchFamily="49" charset="0"/>
+                <a:cs typeface="Cascadia Code" panose="020B0609020000020004" pitchFamily="49" charset="0"/>
+              </a:rPr>
+              <a:t>) ; returns 2</a:t>
             </a:r>
           </a:p>
           <a:p>
@@ -8234,7 +8589,17 @@
                 <a:latin typeface="Cascadia Code" panose="020B0609020000020004" pitchFamily="49" charset="0"/>
                 <a:cs typeface="Cascadia Code" panose="020B0609020000020004" pitchFamily="49" charset="0"/>
               </a:rPr>
-              <a:t>(“</a:t>
+              <a:t>(</a:t>
+            </a:r>
+            <a:r>
+              <a:rPr lang="en-US" sz="2800" dirty="0">
+                <a:solidFill>
+                  <a:schemeClr val="accent1"/>
+                </a:solidFill>
+                <a:latin typeface="Cascadia Code" panose="020B0609020000020004" pitchFamily="49" charset="0"/>
+                <a:cs typeface="Cascadia Code" panose="020B0609020000020004" pitchFamily="49" charset="0"/>
+              </a:rPr>
+              <a:t>"</a:t>
             </a:r>
             <a:r>
               <a:rPr lang="en-US" sz="2800" dirty="0" err="1">
@@ -8245,10 +8610,30 @@
             </a:r>
             <a:r>
               <a:rPr lang="en-US" sz="2800" dirty="0">
-                <a:latin typeface="Cascadia Code" panose="020B0609020000020004" pitchFamily="49" charset="0"/>
-                <a:cs typeface="Cascadia Code" panose="020B0609020000020004" pitchFamily="49" charset="0"/>
-              </a:rPr>
-              <a:t>” 2) ; calls a function named “</a:t>
+                <a:solidFill>
+                  <a:schemeClr val="accent1"/>
+                </a:solidFill>
+                <a:latin typeface="Cascadia Code" panose="020B0609020000020004" pitchFamily="49" charset="0"/>
+                <a:cs typeface="Cascadia Code" panose="020B0609020000020004" pitchFamily="49" charset="0"/>
+              </a:rPr>
+              <a:t>"</a:t>
+            </a:r>
+            <a:r>
+              <a:rPr lang="en-US" sz="2800" dirty="0">
+                <a:latin typeface="Cascadia Code" panose="020B0609020000020004" pitchFamily="49" charset="0"/>
+                <a:cs typeface="Cascadia Code" panose="020B0609020000020004" pitchFamily="49" charset="0"/>
+              </a:rPr>
+              <a:t> 2) ; calls a function named </a:t>
+            </a:r>
+            <a:r>
+              <a:rPr lang="en-US" sz="2800" dirty="0">
+                <a:solidFill>
+                  <a:schemeClr val="accent1"/>
+                </a:solidFill>
+                <a:latin typeface="Cascadia Code" panose="020B0609020000020004" pitchFamily="49" charset="0"/>
+                <a:cs typeface="Cascadia Code" panose="020B0609020000020004" pitchFamily="49" charset="0"/>
+              </a:rPr>
+              <a:t>"</a:t>
             </a:r>
             <a:r>
               <a:rPr lang="en-US" sz="2800" dirty="0" err="1">
@@ -8259,11 +8644,18 @@
             </a:r>
             <a:r>
               <a:rPr lang="en-US" sz="2800" dirty="0">
-                <a:latin typeface="Cascadia Code" panose="020B0609020000020004" pitchFamily="49" charset="0"/>
-                <a:cs typeface="Cascadia Code" panose="020B0609020000020004" pitchFamily="49" charset="0"/>
-              </a:rPr>
-              <a:t>”</a:t>
-            </a:r>
+                <a:solidFill>
+                  <a:schemeClr val="accent1"/>
+                </a:solidFill>
+                <a:latin typeface="Cascadia Code" panose="020B0609020000020004" pitchFamily="49" charset="0"/>
+                <a:cs typeface="Cascadia Code" panose="020B0609020000020004" pitchFamily="49" charset="0"/>
+              </a:rPr>
+              <a:t>"</a:t>
+            </a:r>
+            <a:endParaRPr lang="en-US" sz="2800" dirty="0">
+              <a:latin typeface="Cascadia Code" panose="020B0609020000020004" pitchFamily="49" charset="0"/>
+              <a:cs typeface="Cascadia Code" panose="020B0609020000020004" pitchFamily="49" charset="0"/>
+            </a:endParaRPr>
           </a:p>
         </p:txBody>
       </p:sp>
@@ -8315,11 +8707,13 @@
         </p:nvSpPr>
         <p:spPr/>
         <p:txBody>
-          <a:bodyPr/>
+          <a:bodyPr>
+            <a:normAutofit/>
+          </a:bodyPr>
           <a:lstStyle/>
           <a:p>
             <a:r>
-              <a:rPr lang="en-US" dirty="0"/>
+              <a:rPr lang="en-US" sz="4000" dirty="0"/>
               <a:t>Accessing .NET from Braid</a:t>
             </a:r>
           </a:p>
@@ -8374,7 +8768,35 @@
                 <a:latin typeface="Cascadia Code" panose="020B0609020000020004" pitchFamily="49" charset="0"/>
                 <a:cs typeface="Cascadia Code" panose="020B0609020000020004" pitchFamily="49" charset="0"/>
               </a:rPr>
-              <a:t>(^int? “123”)  ; cast string to int</a:t>
+              <a:t>(^int? </a:t>
+            </a:r>
+            <a:r>
+              <a:rPr lang="en-US" sz="2800" dirty="0">
+                <a:latin typeface="Cascadia Code" panose="020B0609020000020004" pitchFamily="49" charset="0"/>
+                <a:cs typeface="Cascadia Code" panose="020B0609020000020004" pitchFamily="49" charset="0"/>
+              </a:rPr>
+              <a:t>"</a:t>
+            </a:r>
+            <a:r>
+              <a:rPr lang="en-US" sz="2600" dirty="0">
+                <a:latin typeface="Cascadia Code" panose="020B0609020000020004" pitchFamily="49" charset="0"/>
+                <a:cs typeface="Cascadia Code" panose="020B0609020000020004" pitchFamily="49" charset="0"/>
+              </a:rPr>
+              <a:t>23</a:t>
+            </a:r>
+            <a:r>
+              <a:rPr lang="en-US" sz="2800" dirty="0">
+                <a:latin typeface="Cascadia Code" panose="020B0609020000020004" pitchFamily="49" charset="0"/>
+                <a:cs typeface="Cascadia Code" panose="020B0609020000020004" pitchFamily="49" charset="0"/>
+              </a:rPr>
+              <a:t>"</a:t>
+            </a:r>
+            <a:r>
+              <a:rPr lang="en-US" sz="2600" dirty="0">
+                <a:latin typeface="Cascadia Code" panose="020B0609020000020004" pitchFamily="49" charset="0"/>
+                <a:cs typeface="Cascadia Code" panose="020B0609020000020004" pitchFamily="49" charset="0"/>
+              </a:rPr>
+              <a:t>)  ; cast string to int</a:t>
             </a:r>
           </a:p>
           <a:p>
@@ -8392,7 +8814,14 @@
                 <a:latin typeface="Cascadia Code" panose="020B0609020000020004" pitchFamily="49" charset="0"/>
                 <a:cs typeface="Cascadia Code" panose="020B0609020000020004" pitchFamily="49" charset="0"/>
               </a:rPr>
-              <a:t>(.Length “</a:t>
+              <a:t>(.Length </a:t>
+            </a:r>
+            <a:r>
+              <a:rPr lang="en-US" sz="2800" dirty="0">
+                <a:latin typeface="Cascadia Code" panose="020B0609020000020004" pitchFamily="49" charset="0"/>
+                <a:cs typeface="Cascadia Code" panose="020B0609020000020004" pitchFamily="49" charset="0"/>
+              </a:rPr>
+              <a:t>"</a:t>
             </a:r>
             <a:r>
               <a:rPr lang="en-US" sz="2600" dirty="0" err="1">
@@ -8402,11 +8831,18 @@
               <a:t>abc</a:t>
             </a:r>
             <a:r>
+              <a:rPr lang="en-US" sz="2800" dirty="0">
+                <a:latin typeface="Cascadia Code" panose="020B0609020000020004" pitchFamily="49" charset="0"/>
+                <a:cs typeface="Cascadia Code" panose="020B0609020000020004" pitchFamily="49" charset="0"/>
+              </a:rPr>
+              <a:t>"</a:t>
+            </a:r>
+            <a:r>
               <a:rPr lang="en-US" sz="2600" dirty="0">
                 <a:latin typeface="Cascadia Code" panose="020B0609020000020004" pitchFamily="49" charset="0"/>
                 <a:cs typeface="Cascadia Code" panose="020B0609020000020004" pitchFamily="49" charset="0"/>
               </a:rPr>
-              <a:t>”) ; returns 3</a:t>
+              <a:t>) 			; returns 3</a:t>
             </a:r>
           </a:p>
           <a:p>
@@ -8418,7 +8854,45 @@
                 <a:latin typeface="Cascadia Code" panose="020B0609020000020004" pitchFamily="49" charset="0"/>
                 <a:cs typeface="Cascadia Code" panose="020B0609020000020004" pitchFamily="49" charset="0"/>
               </a:rPr>
-              <a:t>(.Substring “hello” 1) ; returns “</a:t>
+              <a:t>(.Substring </a:t>
+            </a:r>
+            <a:r>
+              <a:rPr lang="en-US" sz="2800" dirty="0">
+                <a:latin typeface="Cascadia Code" panose="020B0609020000020004" pitchFamily="49" charset="0"/>
+                <a:cs typeface="Cascadia Code" panose="020B0609020000020004" pitchFamily="49" charset="0"/>
+              </a:rPr>
+              <a:t>"</a:t>
+            </a:r>
+            <a:r>
+              <a:rPr lang="en-US" sz="2600" dirty="0">
+                <a:latin typeface="Cascadia Code" panose="020B0609020000020004" pitchFamily="49" charset="0"/>
+                <a:cs typeface="Cascadia Code" panose="020B0609020000020004" pitchFamily="49" charset="0"/>
+              </a:rPr>
+              <a:t>hello</a:t>
+            </a:r>
+            <a:r>
+              <a:rPr lang="en-US" sz="2800" dirty="0">
+                <a:latin typeface="Cascadia Code" panose="020B0609020000020004" pitchFamily="49" charset="0"/>
+                <a:cs typeface="Cascadia Code" panose="020B0609020000020004" pitchFamily="49" charset="0"/>
+              </a:rPr>
+              <a:t>"</a:t>
+            </a:r>
+            <a:r>
+              <a:rPr lang="en-US" sz="2600" dirty="0">
+                <a:latin typeface="Cascadia Code" panose="020B0609020000020004" pitchFamily="49" charset="0"/>
+                <a:cs typeface="Cascadia Code" panose="020B0609020000020004" pitchFamily="49" charset="0"/>
+              </a:rPr>
+              <a:t> 1) 	; returns </a:t>
+            </a:r>
+            <a:r>
+              <a:rPr lang="en-US" sz="2800" dirty="0">
+                <a:solidFill>
+                  <a:schemeClr val="accent1"/>
+                </a:solidFill>
+                <a:latin typeface="Cascadia Code" panose="020B0609020000020004" pitchFamily="49" charset="0"/>
+                <a:cs typeface="Cascadia Code" panose="020B0609020000020004" pitchFamily="49" charset="0"/>
+              </a:rPr>
+              <a:t>"</a:t>
             </a:r>
             <a:r>
               <a:rPr lang="en-US" sz="2600" dirty="0" err="1">
@@ -8428,12 +8902,19 @@
               <a:t>ello</a:t>
             </a:r>
             <a:r>
-              <a:rPr lang="en-US" sz="2600" dirty="0">
-                <a:latin typeface="Cascadia Code" panose="020B0609020000020004" pitchFamily="49" charset="0"/>
-                <a:cs typeface="Cascadia Code" panose="020B0609020000020004" pitchFamily="49" charset="0"/>
-              </a:rPr>
-              <a:t>”</a:t>
-            </a:r>
+              <a:rPr lang="en-US" sz="2800" dirty="0">
+                <a:solidFill>
+                  <a:schemeClr val="accent1"/>
+                </a:solidFill>
+                <a:latin typeface="Cascadia Code" panose="020B0609020000020004" pitchFamily="49" charset="0"/>
+                <a:cs typeface="Cascadia Code" panose="020B0609020000020004" pitchFamily="49" charset="0"/>
+              </a:rPr>
+              <a:t>"</a:t>
+            </a:r>
+            <a:endParaRPr lang="en-US" sz="2600" dirty="0">
+              <a:latin typeface="Cascadia Code" panose="020B0609020000020004" pitchFamily="49" charset="0"/>
+              <a:cs typeface="Cascadia Code" panose="020B0609020000020004" pitchFamily="49" charset="0"/>
+            </a:endParaRPr>
           </a:p>
           <a:p>
             <a:pPr marL="457200" lvl="1" indent="0">
@@ -8444,7 +8925,59 @@
                 <a:latin typeface="Cascadia Code" panose="020B0609020000020004" pitchFamily="49" charset="0"/>
                 <a:cs typeface="Cascadia Code" panose="020B0609020000020004" pitchFamily="49" charset="0"/>
               </a:rPr>
-              <a:t>(.Substring “hello” 2 2) ; returns “</a:t>
+              <a:t>(.Substring </a:t>
+            </a:r>
+            <a:r>
+              <a:rPr lang="en-US" sz="2800" dirty="0">
+                <a:latin typeface="Cascadia Code" panose="020B0609020000020004" pitchFamily="49" charset="0"/>
+                <a:cs typeface="Cascadia Code" panose="020B0609020000020004" pitchFamily="49" charset="0"/>
+              </a:rPr>
+              <a:t>"</a:t>
+            </a:r>
+            <a:r>
+              <a:rPr lang="en-US" sz="2600" dirty="0">
+                <a:latin typeface="Cascadia Code" panose="020B0609020000020004" pitchFamily="49" charset="0"/>
+                <a:cs typeface="Cascadia Code" panose="020B0609020000020004" pitchFamily="49" charset="0"/>
+              </a:rPr>
+              <a:t>hello</a:t>
+            </a:r>
+            <a:r>
+              <a:rPr lang="en-US" sz="2800" dirty="0">
+                <a:latin typeface="Cascadia Code" panose="020B0609020000020004" pitchFamily="49" charset="0"/>
+                <a:cs typeface="Cascadia Code" panose="020B0609020000020004" pitchFamily="49" charset="0"/>
+              </a:rPr>
+              <a:t>"</a:t>
+            </a:r>
+            <a:r>
+              <a:rPr lang="en-US" sz="2600" dirty="0">
+                <a:latin typeface="Cascadia Code" panose="020B0609020000020004" pitchFamily="49" charset="0"/>
+                <a:cs typeface="Cascadia Code" panose="020B0609020000020004" pitchFamily="49" charset="0"/>
+              </a:rPr>
+              <a:t> 2 2</a:t>
+            </a:r>
+            <a:r>
+              <a:rPr lang="en-US" sz="2600">
+                <a:latin typeface="Cascadia Code" panose="020B0609020000020004" pitchFamily="49" charset="0"/>
+                <a:cs typeface="Cascadia Code" panose="020B0609020000020004" pitchFamily="49" charset="0"/>
+              </a:rPr>
+              <a:t>) 	; </a:t>
+            </a:r>
+            <a:r>
+              <a:rPr lang="en-US" sz="2600" dirty="0">
+                <a:latin typeface="Cascadia Code" panose="020B0609020000020004" pitchFamily="49" charset="0"/>
+                <a:cs typeface="Cascadia Code" panose="020B0609020000020004" pitchFamily="49" charset="0"/>
+              </a:rPr>
+              <a:t>returns </a:t>
+            </a:r>
+            <a:r>
+              <a:rPr lang="en-US" sz="2800" dirty="0">
+                <a:solidFill>
+                  <a:schemeClr val="accent1"/>
+                </a:solidFill>
+                <a:latin typeface="Cascadia Code" panose="020B0609020000020004" pitchFamily="49" charset="0"/>
+                <a:cs typeface="Cascadia Code" panose="020B0609020000020004" pitchFamily="49" charset="0"/>
+              </a:rPr>
+              <a:t>"</a:t>
             </a:r>
             <a:r>
               <a:rPr lang="en-US" sz="2600" dirty="0" err="1">
@@ -8454,12 +8987,19 @@
               <a:t>ll</a:t>
             </a:r>
             <a:r>
-              <a:rPr lang="en-US" sz="2600" dirty="0">
-                <a:latin typeface="Cascadia Code" panose="020B0609020000020004" pitchFamily="49" charset="0"/>
-                <a:cs typeface="Cascadia Code" panose="020B0609020000020004" pitchFamily="49" charset="0"/>
-              </a:rPr>
-              <a:t>”</a:t>
-            </a:r>
+              <a:rPr lang="en-US" sz="2800" dirty="0">
+                <a:solidFill>
+                  <a:schemeClr val="accent1"/>
+                </a:solidFill>
+                <a:latin typeface="Cascadia Code" panose="020B0609020000020004" pitchFamily="49" charset="0"/>
+                <a:cs typeface="Cascadia Code" panose="020B0609020000020004" pitchFamily="49" charset="0"/>
+              </a:rPr>
+              <a:t>"</a:t>
+            </a:r>
+            <a:endParaRPr lang="en-US" sz="2600" dirty="0">
+              <a:latin typeface="Cascadia Code" panose="020B0609020000020004" pitchFamily="49" charset="0"/>
+              <a:cs typeface="Cascadia Code" panose="020B0609020000020004" pitchFamily="49" charset="0"/>
+            </a:endParaRPr>
           </a:p>
           <a:p>
             <a:r>
@@ -8706,7 +9246,7 @@
           <a:lstStyle/>
           <a:p>
             <a:r>
-              <a:rPr lang="en-US" sz="4400" dirty="0"/>
+              <a:rPr lang="en-US" sz="4000" dirty="0"/>
               <a:t>Differences: Braid is Strict by default</a:t>
             </a:r>
           </a:p>
@@ -8849,11 +9389,13 @@
         </p:nvSpPr>
         <p:spPr/>
         <p:txBody>
-          <a:bodyPr/>
+          <a:bodyPr>
+            <a:normAutofit/>
+          </a:bodyPr>
           <a:lstStyle/>
           <a:p>
             <a:r>
-              <a:rPr lang="en-US" dirty="0"/>
+              <a:rPr lang="en-US" sz="4000" dirty="0"/>
               <a:t>The Braid Pipeline</a:t>
             </a:r>
           </a:p>
@@ -8875,7 +9417,12 @@
             <p:ph idx="1"/>
           </p:nvPr>
         </p:nvSpPr>
-        <p:spPr/>
+        <p:spPr>
+          <a:xfrm>
+            <a:off x="838200" y="1520825"/>
+            <a:ext cx="10515600" cy="4351338"/>
+          </a:xfrm>
+        </p:spPr>
         <p:txBody>
           <a:bodyPr>
             <a:normAutofit fontScale="85000" lnSpcReduction="10000"/>
@@ -8963,8 +9510,12 @@
           </a:p>
           <a:p>
             <a:r>
+              <a:rPr lang="en-US" i="1" dirty="0"/>
+              <a:t>Strict processing </a:t>
+            </a:r>
+            <a:r>
               <a:rPr lang="en-US" dirty="0"/>
-              <a:t>Strict processing semantics by default, optional lazy functions</a:t>
+              <a:t>semantics by default, optional lazy functions</a:t>
             </a:r>
           </a:p>
         </p:txBody>
@@ -9017,11 +9568,13 @@
         </p:nvSpPr>
         <p:spPr/>
         <p:txBody>
-          <a:bodyPr/>
+          <a:bodyPr>
+            <a:normAutofit/>
+          </a:bodyPr>
           <a:lstStyle/>
           <a:p>
             <a:r>
-              <a:rPr lang="en-US" dirty="0"/>
+              <a:rPr lang="en-US" sz="4000" dirty="0"/>
               <a:t>Braid Functions</a:t>
             </a:r>
           </a:p>
@@ -9043,7 +9596,12 @@
             <p:ph idx="1"/>
           </p:nvPr>
         </p:nvSpPr>
-        <p:spPr/>
+        <p:spPr>
+          <a:xfrm>
+            <a:off x="838200" y="1469813"/>
+            <a:ext cx="10515600" cy="4707150"/>
+          </a:xfrm>
+        </p:spPr>
         <p:txBody>
           <a:bodyPr>
             <a:normAutofit/>
@@ -9096,6 +9654,13 @@
             <a:r>
               <a:rPr lang="en-US" dirty="0"/>
               <a:t> evaluated</a:t>
+            </a:r>
+          </a:p>
+          <a:p>
+            <a:pPr lvl="1"/>
+            <a:r>
+              <a:rPr lang="en-US" dirty="0"/>
+              <a:t>Pattern Functions # Match against arguments</a:t>
             </a:r>
           </a:p>
           <a:p>
@@ -9302,11 +9867,13 @@
           </a:xfrm>
         </p:spPr>
         <p:txBody>
-          <a:bodyPr/>
+          <a:bodyPr>
+            <a:normAutofit/>
+          </a:bodyPr>
           <a:lstStyle/>
           <a:p>
             <a:r>
-              <a:rPr lang="en-US" dirty="0"/>
+              <a:rPr lang="en-US" sz="4000" dirty="0"/>
               <a:t>Code is Data</a:t>
             </a:r>
           </a:p>
@@ -9345,6 +9912,9 @@
             </a:pPr>
             <a:r>
               <a:rPr lang="en-US" sz="3200" dirty="0">
+                <a:solidFill>
+                  <a:schemeClr val="accent1"/>
+                </a:solidFill>
                 <a:latin typeface="Cascadia Mono" panose="020B0609020000020004" pitchFamily="49" charset="0"/>
                 <a:cs typeface="Cascadia Mono" panose="020B0609020000020004" pitchFamily="49" charset="0"/>
               </a:rPr>
@@ -9352,6 +9922,9 @@
             </a:r>
             <a:r>
               <a:rPr lang="en-US" sz="3200" dirty="0" err="1">
+                <a:solidFill>
+                  <a:schemeClr val="accent1"/>
+                </a:solidFill>
                 <a:latin typeface="Cascadia Mono" panose="020B0609020000020004" pitchFamily="49" charset="0"/>
                 <a:cs typeface="Cascadia Mono" panose="020B0609020000020004" pitchFamily="49" charset="0"/>
               </a:rPr>
@@ -9359,6 +9932,9 @@
             </a:r>
             <a:r>
               <a:rPr lang="en-US" sz="3200" dirty="0">
+                <a:solidFill>
+                  <a:schemeClr val="accent1"/>
+                </a:solidFill>
                 <a:latin typeface="Cascadia Mono" panose="020B0609020000020004" pitchFamily="49" charset="0"/>
                 <a:cs typeface="Cascadia Mono" panose="020B0609020000020004" pitchFamily="49" charset="0"/>
               </a:rPr>
@@ -9371,6 +9947,9 @@
             </a:pPr>
             <a:r>
               <a:rPr lang="en-US" sz="3200" dirty="0">
+                <a:solidFill>
+                  <a:schemeClr val="accent1"/>
+                </a:solidFill>
                 <a:latin typeface="Cascadia Mono" panose="020B0609020000020004" pitchFamily="49" charset="0"/>
                 <a:cs typeface="Cascadia Mono" panose="020B0609020000020004" pitchFamily="49" charset="0"/>
               </a:rPr>
@@ -9378,6 +9957,9 @@
             </a:r>
             <a:r>
               <a:rPr lang="en-US" sz="3200" dirty="0" err="1">
+                <a:solidFill>
+                  <a:schemeClr val="accent1"/>
+                </a:solidFill>
                 <a:latin typeface="Cascadia Mono" panose="020B0609020000020004" pitchFamily="49" charset="0"/>
                 <a:cs typeface="Cascadia Mono" panose="020B0609020000020004" pitchFamily="49" charset="0"/>
               </a:rPr>
@@ -9385,6 +9967,9 @@
             </a:r>
             <a:r>
               <a:rPr lang="en-US" sz="3200" dirty="0">
+                <a:solidFill>
+                  <a:schemeClr val="accent1"/>
+                </a:solidFill>
                 <a:latin typeface="Cascadia Mono" panose="020B0609020000020004" pitchFamily="49" charset="0"/>
                 <a:cs typeface="Cascadia Mono" panose="020B0609020000020004" pitchFamily="49" charset="0"/>
               </a:rPr>
@@ -9397,6 +9982,9 @@
             </a:pPr>
             <a:r>
               <a:rPr lang="en-US" sz="3200" dirty="0" err="1">
+                <a:solidFill>
+                  <a:schemeClr val="accent1"/>
+                </a:solidFill>
                 <a:latin typeface="Cascadia Mono" panose="020B0609020000020004" pitchFamily="49" charset="0"/>
                 <a:cs typeface="Cascadia Mono" panose="020B0609020000020004" pitchFamily="49" charset="0"/>
               </a:rPr>
@@ -9404,6 +9992,9 @@
             </a:r>
             <a:r>
               <a:rPr lang="en-US" sz="3200" dirty="0">
+                <a:solidFill>
+                  <a:schemeClr val="accent1"/>
+                </a:solidFill>
                 <a:latin typeface="Cascadia Mono" panose="020B0609020000020004" pitchFamily="49" charset="0"/>
                 <a:cs typeface="Cascadia Mono" panose="020B0609020000020004" pitchFamily="49" charset="0"/>
               </a:rPr>
@@ -9416,6 +10007,9 @@
             </a:pPr>
             <a:r>
               <a:rPr lang="en-US" sz="3200" dirty="0">
+                <a:solidFill>
+                  <a:schemeClr val="accent1"/>
+                </a:solidFill>
                 <a:latin typeface="Cascadia Mono" panose="020B0609020000020004" pitchFamily="49" charset="0"/>
                 <a:cs typeface="Cascadia Mono" panose="020B0609020000020004" pitchFamily="49" charset="0"/>
               </a:rPr>
@@ -9423,6 +10017,9 @@
             </a:r>
             <a:r>
               <a:rPr lang="en-US" sz="3200" dirty="0" err="1">
+                <a:solidFill>
+                  <a:schemeClr val="accent1"/>
+                </a:solidFill>
                 <a:latin typeface="Cascadia Mono" panose="020B0609020000020004" pitchFamily="49" charset="0"/>
                 <a:cs typeface="Cascadia Mono" panose="020B0609020000020004" pitchFamily="49" charset="0"/>
               </a:rPr>
@@ -9430,6 +10027,9 @@
             </a:r>
             <a:r>
               <a:rPr lang="en-US" sz="3200" dirty="0">
+                <a:solidFill>
+                  <a:schemeClr val="accent1"/>
+                </a:solidFill>
                 <a:latin typeface="Cascadia Mono" panose="020B0609020000020004" pitchFamily="49" charset="0"/>
                 <a:cs typeface="Cascadia Mono" panose="020B0609020000020004" pitchFamily="49" charset="0"/>
               </a:rPr>
@@ -9442,6 +10042,9 @@
             </a:pPr>
             <a:r>
               <a:rPr lang="en-US" sz="3200" dirty="0">
+                <a:solidFill>
+                  <a:schemeClr val="accent1"/>
+                </a:solidFill>
                 <a:latin typeface="Cascadia Mono" panose="020B0609020000020004" pitchFamily="49" charset="0"/>
                 <a:cs typeface="Cascadia Mono" panose="020B0609020000020004" pitchFamily="49" charset="0"/>
               </a:rPr>
@@ -9449,6 +10052,9 @@
             </a:r>
             <a:r>
               <a:rPr lang="en-US" sz="3200" dirty="0" err="1">
+                <a:solidFill>
+                  <a:schemeClr val="accent1"/>
+                </a:solidFill>
                 <a:latin typeface="Cascadia Mono" panose="020B0609020000020004" pitchFamily="49" charset="0"/>
                 <a:cs typeface="Cascadia Mono" panose="020B0609020000020004" pitchFamily="49" charset="0"/>
               </a:rPr>
@@ -9456,6 +10062,9 @@
             </a:r>
             <a:r>
               <a:rPr lang="en-US" sz="3200" dirty="0">
+                <a:solidFill>
+                  <a:schemeClr val="accent1"/>
+                </a:solidFill>
                 <a:latin typeface="Cascadia Mono" panose="020B0609020000020004" pitchFamily="49" charset="0"/>
                 <a:cs typeface="Cascadia Mono" panose="020B0609020000020004" pitchFamily="49" charset="0"/>
               </a:rPr>
@@ -9468,6 +10077,9 @@
             </a:pPr>
             <a:r>
               <a:rPr lang="en-US" sz="3200" dirty="0">
+                <a:solidFill>
+                  <a:schemeClr val="accent1"/>
+                </a:solidFill>
                 <a:latin typeface="Cascadia Mono" panose="020B0609020000020004" pitchFamily="49" charset="0"/>
                 <a:cs typeface="Cascadia Mono" panose="020B0609020000020004" pitchFamily="49" charset="0"/>
               </a:rPr>
@@ -9475,6 +10087,9 @@
             </a:r>
             <a:r>
               <a:rPr lang="en-US" sz="3200" dirty="0" err="1">
+                <a:solidFill>
+                  <a:schemeClr val="accent1"/>
+                </a:solidFill>
                 <a:latin typeface="Cascadia Mono" panose="020B0609020000020004" pitchFamily="49" charset="0"/>
                 <a:cs typeface="Cascadia Mono" panose="020B0609020000020004" pitchFamily="49" charset="0"/>
               </a:rPr>
@@ -9482,6 +10097,9 @@
             </a:r>
             <a:r>
               <a:rPr lang="en-US" sz="3200" dirty="0">
+                <a:solidFill>
+                  <a:schemeClr val="accent1"/>
+                </a:solidFill>
                 <a:latin typeface="Cascadia Mono" panose="020B0609020000020004" pitchFamily="49" charset="0"/>
                 <a:cs typeface="Cascadia Mono" panose="020B0609020000020004" pitchFamily="49" charset="0"/>
               </a:rPr>
@@ -9494,6 +10112,9 @@
             </a:pPr>
             <a:r>
               <a:rPr lang="en-US" sz="3200" dirty="0" err="1">
+                <a:solidFill>
+                  <a:schemeClr val="accent1"/>
+                </a:solidFill>
                 <a:latin typeface="Cascadia Mono" panose="020B0609020000020004" pitchFamily="49" charset="0"/>
                 <a:cs typeface="Cascadia Mono" panose="020B0609020000020004" pitchFamily="49" charset="0"/>
               </a:rPr>
@@ -9501,6 +10122,9 @@
             </a:r>
             <a:r>
               <a:rPr lang="en-US" sz="3200" dirty="0">
+                <a:solidFill>
+                  <a:schemeClr val="accent1"/>
+                </a:solidFill>
                 <a:latin typeface="Cascadia Mono" panose="020B0609020000020004" pitchFamily="49" charset="0"/>
                 <a:cs typeface="Cascadia Mono" panose="020B0609020000020004" pitchFamily="49" charset="0"/>
               </a:rPr>
@@ -9693,11 +10317,13 @@
         </p:nvSpPr>
         <p:spPr/>
         <p:txBody>
-          <a:bodyPr/>
+          <a:bodyPr>
+            <a:normAutofit/>
+          </a:bodyPr>
           <a:lstStyle/>
           <a:p>
             <a:r>
-              <a:rPr lang="en-US" dirty="0"/>
+              <a:rPr lang="en-US" sz="4000" dirty="0"/>
               <a:t>Next steps…</a:t>
             </a:r>
           </a:p>
@@ -9819,11 +10445,13 @@
         </p:nvSpPr>
         <p:spPr/>
         <p:txBody>
-          <a:bodyPr/>
+          <a:bodyPr>
+            <a:normAutofit/>
+          </a:bodyPr>
           <a:lstStyle/>
           <a:p>
             <a:r>
-              <a:rPr lang="en-US" dirty="0"/>
+              <a:rPr lang="en-US" sz="4000" dirty="0"/>
               <a:t>Conclusions</a:t>
             </a:r>
           </a:p>
@@ -9858,7 +10486,7 @@
           <a:p>
             <a:r>
               <a:rPr lang="en-US" dirty="0"/>
-              <a:t>Try it out, have fun!</a:t>
+              <a:t>Try it out (after I document it a bit more), have fun!</a:t>
             </a:r>
           </a:p>
         </p:txBody>
@@ -11370,7 +11998,7 @@
             </a:pPr>
             <a:r>
               <a:rPr lang="en-US" dirty="0"/>
-              <a:t>Creator of PowerShell DSC</a:t>
+              <a:t>Creator of the original PowerShell DSC</a:t>
             </a:r>
           </a:p>
           <a:p>
@@ -11390,17 +12018,7 @@
             </a:pPr>
             <a:r>
               <a:rPr lang="en-US" dirty="0"/>
-              <a:t>Very interested (ok obsessed) with programming languages</a:t>
-            </a:r>
-          </a:p>
-          <a:p>
-            <a:pPr lvl="1">
-              <a:buFont typeface="Wingdings" panose="05000000000000000000" pitchFamily="2" charset="2"/>
-              <a:buChar char="§"/>
-            </a:pPr>
-            <a:r>
-              <a:rPr lang="en-US" dirty="0"/>
-              <a:t>‘Notation as a Tool for Thought’ Kenneth Iverson</a:t>
+              <a:t>Very interested in interactive programming languages</a:t>
             </a:r>
           </a:p>
         </p:txBody>
@@ -11533,14 +12151,16 @@
         </p:nvSpPr>
         <p:spPr/>
         <p:txBody>
-          <a:bodyPr/>
+          <a:bodyPr>
+            <a:normAutofit/>
+          </a:bodyPr>
           <a:lstStyle/>
           <a:p>
             <a:r>
-              <a:rPr lang="fr-FR" dirty="0"/>
+              <a:rPr lang="fr-FR" sz="4000" dirty="0"/>
               <a:t>Agenda</a:t>
             </a:r>
-            <a:endParaRPr lang="en-GB" dirty="0"/>
+            <a:endParaRPr lang="en-GB" sz="4000" dirty="0"/>
           </a:p>
         </p:txBody>
       </p:sp>
@@ -11762,12 +12382,12 @@
         </p:spPr>
         <p:txBody>
           <a:bodyPr>
-            <a:normAutofit fontScale="90000"/>
+            <a:normAutofit/>
           </a:bodyPr>
           <a:lstStyle/>
           <a:p>
             <a:r>
-              <a:rPr lang="en-US" dirty="0"/>
+              <a:rPr lang="en-US" sz="4000" dirty="0"/>
               <a:t>What is Braid (According to Copilot)</a:t>
             </a:r>
           </a:p>
@@ -13542,26 +14162,6 @@
 </file>
 
 <file path=customXml/item1.xml><?xml version="1.0" encoding="utf-8"?>
-<p:properties xmlns:p="http://schemas.microsoft.com/office/2006/metadata/properties" xmlns:xsi="http://www.w3.org/2001/XMLSchema-instance" xmlns:pc="http://schemas.microsoft.com/office/infopath/2007/PartnerControls">
-  <documentManagement>
-    <lcf76f155ced4ddcb4097134ff3c332f xmlns="abdc9a1f-962e-4235-838d-61f9c438f4db">
-      <Terms xmlns="http://schemas.microsoft.com/office/infopath/2007/PartnerControls"/>
-    </lcf76f155ced4ddcb4097134ff3c332f>
-    <TaxCatchAll xmlns="de47e97d-64fd-4aef-b10e-fd7d6cfcfcf4" xsi:nil="true"/>
-  </documentManagement>
-</p:properties>
-</file>
-
-<file path=customXml/item2.xml><?xml version="1.0" encoding="utf-8"?>
-<?mso-contentType ?>
-<FormTemplates xmlns="http://schemas.microsoft.com/sharepoint/v3/contenttype/forms">
-  <Display>DocumentLibraryForm</Display>
-  <Edit>DocumentLibraryForm</Edit>
-  <New>DocumentLibraryForm</New>
-</FormTemplates>
-</file>
-
-<file path=customXml/item3.xml><?xml version="1.0" encoding="utf-8"?>
 <ct:contentTypeSchema xmlns:ct="http://schemas.microsoft.com/office/2006/metadata/contentType" xmlns:ma="http://schemas.microsoft.com/office/2006/metadata/properties/metaAttributes" ct:_="" ma:_="" ma:contentTypeName="Document" ma:contentTypeID="0x010100333502FDC476714EB47BD1BE2BFD7B3D" ma:contentTypeVersion="13" ma:contentTypeDescription="Create a new document." ma:contentTypeScope="" ma:versionID="0d4fb5ca5076182280cb93c7d6bdff79">
   <xsd:schema xmlns:xsd="http://www.w3.org/2001/XMLSchema" xmlns:xs="http://www.w3.org/2001/XMLSchema" xmlns:p="http://schemas.microsoft.com/office/2006/metadata/properties" xmlns:ns2="abdc9a1f-962e-4235-838d-61f9c438f4db" xmlns:ns3="de47e97d-64fd-4aef-b10e-fd7d6cfcfcf4" targetNamespace="http://schemas.microsoft.com/office/2006/metadata/properties" ma:root="true" ma:fieldsID="da14a0effa8c0f0120811d0692d695e7" ns2:_="" ns3:_="">
     <xsd:import namespace="abdc9a1f-962e-4235-838d-61f9c438f4db"/>
@@ -13768,30 +14368,27 @@
 </ct:contentTypeSchema>
 </file>
 
-<file path=customXml/itemProps1.xml><?xml version="1.0" encoding="utf-8"?>
-<ds:datastoreItem xmlns:ds="http://schemas.openxmlformats.org/officeDocument/2006/customXml" ds:itemID="{AA9C06E3-346E-408E-B352-32E922A070CE}">
-  <ds:schemaRefs>
-    <ds:schemaRef ds:uri="2347cc20-e10c-452d-848a-c18e83138525"/>
-    <ds:schemaRef ds:uri="58c243a5-121d-4837-b81c-114e1b569ece"/>
-    <ds:schemaRef ds:uri="77f18391-c91f-4725-9130-63caf76c1806"/>
-    <ds:schemaRef ds:uri="85c0ce47-fe9c-4809-bf88-519c39a738e6"/>
-    <ds:schemaRef ds:uri="abdc9a1f-962e-4235-838d-61f9c438f4db"/>
-    <ds:schemaRef ds:uri="de47e97d-64fd-4aef-b10e-fd7d6cfcfcf4"/>
-    <ds:schemaRef ds:uri="http://schemas.microsoft.com/office/2006/metadata/properties"/>
-    <ds:schemaRef ds:uri="http://schemas.microsoft.com/office/infopath/2007/PartnerControls"/>
-  </ds:schemaRefs>
-</ds:datastoreItem>
+<file path=customXml/item2.xml><?xml version="1.0" encoding="utf-8"?>
+<?mso-contentType ?>
+<FormTemplates xmlns="http://schemas.microsoft.com/sharepoint/v3/contenttype/forms">
+  <Display>DocumentLibraryForm</Display>
+  <Edit>DocumentLibraryForm</Edit>
+  <New>DocumentLibraryForm</New>
+</FormTemplates>
 </file>
 
-<file path=customXml/itemProps2.xml><?xml version="1.0" encoding="utf-8"?>
-<ds:datastoreItem xmlns:ds="http://schemas.openxmlformats.org/officeDocument/2006/customXml" ds:itemID="{57D9B22B-F436-4FE5-B6C0-65AB2260F593}">
-  <ds:schemaRefs>
-    <ds:schemaRef ds:uri="http://schemas.microsoft.com/sharepoint/v3/contenttype/forms"/>
-  </ds:schemaRefs>
-</ds:datastoreItem>
+<file path=customXml/item3.xml><?xml version="1.0" encoding="utf-8"?>
+<p:properties xmlns:p="http://schemas.microsoft.com/office/2006/metadata/properties" xmlns:xsi="http://www.w3.org/2001/XMLSchema-instance" xmlns:pc="http://schemas.microsoft.com/office/infopath/2007/PartnerControls">
+  <documentManagement>
+    <lcf76f155ced4ddcb4097134ff3c332f xmlns="abdc9a1f-962e-4235-838d-61f9c438f4db">
+      <Terms xmlns="http://schemas.microsoft.com/office/infopath/2007/PartnerControls"/>
+    </lcf76f155ced4ddcb4097134ff3c332f>
+    <TaxCatchAll xmlns="de47e97d-64fd-4aef-b10e-fd7d6cfcfcf4" xsi:nil="true"/>
+  </documentManagement>
+</p:properties>
 </file>
 
-<file path=customXml/itemProps3.xml><?xml version="1.0" encoding="utf-8"?>
+<file path=customXml/itemProps1.xml><?xml version="1.0" encoding="utf-8"?>
 <ds:datastoreItem xmlns:ds="http://schemas.openxmlformats.org/officeDocument/2006/customXml" ds:itemID="{2C38D965-436F-4DCC-97AA-50BEF4F7BE29}">
   <ds:schemaRefs>
     <ds:schemaRef ds:uri="abdc9a1f-962e-4235-838d-61f9c438f4db"/>
@@ -13808,4 +14405,27 @@
     <ds:schemaRef ds:uri="http://www.w3.org/2001/XMLSchema"/>
   </ds:schemaRefs>
 </ds:datastoreItem>
+</file>
+
+<file path=customXml/itemProps2.xml><?xml version="1.0" encoding="utf-8"?>
+<ds:datastoreItem xmlns:ds="http://schemas.openxmlformats.org/officeDocument/2006/customXml" ds:itemID="{57D9B22B-F436-4FE5-B6C0-65AB2260F593}">
+  <ds:schemaRefs>
+    <ds:schemaRef ds:uri="http://schemas.microsoft.com/sharepoint/v3/contenttype/forms"/>
+  </ds:schemaRefs>
+</ds:datastoreItem>
+</file>
+
+<file path=customXml/itemProps3.xml><?xml version="1.0" encoding="utf-8"?>
+<ds:datastoreItem xmlns:ds="http://schemas.openxmlformats.org/officeDocument/2006/customXml" ds:itemID="{AA9C06E3-346E-408E-B352-32E922A070CE}">
+  <ds:schemaRefs>
+    <ds:schemaRef ds:uri="2347cc20-e10c-452d-848a-c18e83138525"/>
+    <ds:schemaRef ds:uri="58c243a5-121d-4837-b81c-114e1b569ece"/>
+    <ds:schemaRef ds:uri="77f18391-c91f-4725-9130-63caf76c1806"/>
+    <ds:schemaRef ds:uri="85c0ce47-fe9c-4809-bf88-519c39a738e6"/>
+    <ds:schemaRef ds:uri="abdc9a1f-962e-4235-838d-61f9c438f4db"/>
+    <ds:schemaRef ds:uri="de47e97d-64fd-4aef-b10e-fd7d6cfcfcf4"/>
+    <ds:schemaRef ds:uri="http://schemas.microsoft.com/office/2006/metadata/properties"/>
+    <ds:schemaRef ds:uri="http://schemas.microsoft.com/office/infopath/2007/PartnerControls"/>
+  </ds:schemaRefs>
+</ds:datastoreItem>
 </file>
--- a/PSCONF26_Payette_Leveraging_Braid.pptx
+++ b/PSCONF26_Payette_Leveraging_Braid.pptx
@@ -19,7 +19,7 @@
     <p:sldId id="269" r:id="rId10"/>
     <p:sldId id="270" r:id="rId11"/>
     <p:sldId id="273" r:id="rId12"/>
-    <p:sldId id="261" r:id="rId13"/>
+    <p:sldId id="293" r:id="rId13"/>
     <p:sldId id="267" r:id="rId14"/>
     <p:sldId id="260" r:id="rId15"/>
     <p:sldId id="285" r:id="rId16"/>
@@ -154,7 +154,7 @@
         <p14:section name="The session" id="{9BCE8471-468A-4538-82B3-E4E62B0A593E}">
           <p14:sldIdLst>
             <p14:sldId id="273"/>
-            <p14:sldId id="261"/>
+            <p14:sldId id="293"/>
             <p14:sldId id="267"/>
             <p14:sldId id="260"/>
             <p14:sldId id="285"/>
@@ -397,7 +397,7 @@
           <a:p>
             <a:fld id="{69440670-43D7-400A-ABC5-B69E064DBB37}" type="datetimeFigureOut">
               <a:rPr lang="en-GB" smtClean="0"/>
-              <a:t>30/05/2026</a:t>
+              <a:t>01/06/2026</a:t>
             </a:fld>
             <a:endParaRPr lang="en-GB"/>
           </a:p>
@@ -574,7 +574,7 @@
           <a:p>
             <a:fld id="{611B03A4-75C9-4E3D-9183-2102CA9AEC33}" type="datetimeFigureOut">
               <a:rPr lang="en-GB" smtClean="0"/>
-              <a:t>30/05/2026</a:t>
+              <a:t>01/06/2026</a:t>
             </a:fld>
             <a:endParaRPr lang="en-GB"/>
           </a:p>
@@ -1243,90 +1243,6 @@
           <a:p>
             <a:fld id="{A7839206-A81D-4F76-8486-302187992F73}" type="slidenum">
               <a:rPr lang="en-GB" smtClean="0"/>
-              <a:t>6</a:t>
-            </a:fld>
-            <a:endParaRPr lang="en-GB"/>
-          </a:p>
-        </p:txBody>
-      </p:sp>
-    </p:spTree>
-    <p:extLst>
-      <p:ext uri="{BB962C8B-B14F-4D97-AF65-F5344CB8AC3E}">
-        <p14:creationId xmlns:p14="http://schemas.microsoft.com/office/powerpoint/2010/main" val="529600659"/>
-      </p:ext>
-    </p:extLst>
-  </p:cSld>
-  <p:clrMapOvr>
-    <a:masterClrMapping/>
-  </p:clrMapOvr>
-</p:notes>
-</file>
-
-<file path=ppt/notesSlides/notesSlide6.xml><?xml version="1.0" encoding="utf-8"?>
-<p:notes xmlns:a="http://schemas.openxmlformats.org/drawingml/2006/main" xmlns:r="http://schemas.openxmlformats.org/officeDocument/2006/relationships" xmlns:p="http://schemas.openxmlformats.org/presentationml/2006/main">
-  <p:cSld>
-    <p:spTree>
-      <p:nvGrpSpPr>
-        <p:cNvPr id="1" name=""/>
-        <p:cNvGrpSpPr/>
-        <p:nvPr/>
-      </p:nvGrpSpPr>
-      <p:grpSpPr>
-        <a:xfrm>
-          <a:off x="0" y="0"/>
-          <a:ext cx="0" cy="0"/>
-          <a:chOff x="0" y="0"/>
-          <a:chExt cx="0" cy="0"/>
-        </a:xfrm>
-      </p:grpSpPr>
-      <p:sp>
-        <p:nvSpPr>
-          <p:cNvPr id="2" name="Espace réservé de l'image des diapositives 1"/>
-          <p:cNvSpPr>
-            <a:spLocks noGrp="1" noRot="1" noChangeAspect="1"/>
-          </p:cNvSpPr>
-          <p:nvPr>
-            <p:ph type="sldImg"/>
-          </p:nvPr>
-        </p:nvSpPr>
-        <p:spPr/>
-      </p:sp>
-      <p:sp>
-        <p:nvSpPr>
-          <p:cNvPr id="3" name="Espace réservé des notes 2"/>
-          <p:cNvSpPr>
-            <a:spLocks noGrp="1"/>
-          </p:cNvSpPr>
-          <p:nvPr>
-            <p:ph type="body" idx="1"/>
-          </p:nvPr>
-        </p:nvSpPr>
-        <p:spPr/>
-        <p:txBody>
-          <a:bodyPr/>
-          <a:lstStyle/>
-          <a:p>
-            <a:endParaRPr lang="en-GB"/>
-          </a:p>
-        </p:txBody>
-      </p:sp>
-      <p:sp>
-        <p:nvSpPr>
-          <p:cNvPr id="4" name="Espace réservé du numéro de diapositive 3"/>
-          <p:cNvSpPr>
-            <a:spLocks noGrp="1"/>
-          </p:cNvSpPr>
-          <p:nvPr>
-            <p:ph type="sldNum" sz="quarter" idx="5"/>
-          </p:nvPr>
-        </p:nvSpPr>
-        <p:spPr/>
-        <p:txBody>
-          <a:bodyPr/>
-          <a:lstStyle/>
-          <a:p>
-            <a:fld id="{A7839206-A81D-4F76-8486-302187992F73}" type="slidenum">
-              <a:rPr lang="en-GB" smtClean="0"/>
               <a:t>8</a:t>
             </a:fld>
             <a:endParaRPr lang="en-GB"/>
@@ -1346,7 +1262,7 @@
 </p:notes>
 </file>
 
-<file path=ppt/notesSlides/notesSlide7.xml><?xml version="1.0" encoding="utf-8"?>
+<file path=ppt/notesSlides/notesSlide6.xml><?xml version="1.0" encoding="utf-8"?>
 <p:notes xmlns:a="http://schemas.openxmlformats.org/drawingml/2006/main" xmlns:r="http://schemas.openxmlformats.org/officeDocument/2006/relationships" xmlns:p="http://schemas.openxmlformats.org/presentationml/2006/main">
   <p:cSld>
     <p:spTree>
@@ -1433,7 +1349,7 @@
 </p:notes>
 </file>
 
-<file path=ppt/notesSlides/notesSlide8.xml><?xml version="1.0" encoding="utf-8"?>
+<file path=ppt/notesSlides/notesSlide7.xml><?xml version="1.0" encoding="utf-8"?>
 <p:notes xmlns:a="http://schemas.openxmlformats.org/drawingml/2006/main" xmlns:r="http://schemas.openxmlformats.org/officeDocument/2006/relationships" xmlns:p="http://schemas.openxmlformats.org/presentationml/2006/main">
   <p:cSld>
     <p:spTree>
@@ -1541,7 +1457,7 @@
 </p:notes>
 </file>
 
-<file path=ppt/notesSlides/notesSlide9.xml><?xml version="1.0" encoding="utf-8"?>
+<file path=ppt/notesSlides/notesSlide8.xml><?xml version="1.0" encoding="utf-8"?>
 <p:notes xmlns:a="http://schemas.openxmlformats.org/drawingml/2006/main" xmlns:r="http://schemas.openxmlformats.org/officeDocument/2006/relationships" xmlns:p="http://schemas.openxmlformats.org/presentationml/2006/main">
   <p:cSld>
     <p:spTree>
@@ -6084,7 +6000,7 @@
         </p:nvSpPr>
         <p:spPr>
           <a:xfrm>
-            <a:off x="838200" y="107739"/>
+            <a:off x="589430" y="-59855"/>
             <a:ext cx="9733280" cy="1325563"/>
           </a:xfrm>
         </p:spPr>
@@ -6119,25 +6035,25 @@
         </p:nvSpPr>
         <p:spPr>
           <a:xfrm>
-            <a:off x="838200" y="1433301"/>
+            <a:off x="589430" y="989548"/>
             <a:ext cx="10515600" cy="5265525"/>
           </a:xfrm>
         </p:spPr>
         <p:txBody>
           <a:bodyPr>
-            <a:normAutofit/>
+            <a:normAutofit fontScale="92500"/>
           </a:bodyPr>
           <a:lstStyle/>
           <a:p>
             <a:r>
               <a:rPr lang="en-US" dirty="0"/>
-              <a:t>Goal: to explore some alternate ideas for an object-based shell.</a:t>
+              <a:t>As an Exercise: to explore some alternate ideas for an object-based shell.</a:t>
             </a:r>
           </a:p>
           <a:p>
             <a:r>
               <a:rPr lang="en-US" dirty="0"/>
-              <a:t>Practically Braid is generally faster and more efficient than PowerShell so there’s that:</a:t>
+              <a:t>Practical: Braid is generally faster and more efficient than PowerShell so there’s that:</a:t>
             </a:r>
           </a:p>
           <a:p>
@@ -6203,13 +6119,26 @@
           <a:p>
             <a:r>
               <a:rPr lang="en-US" dirty="0"/>
-              <a:t>It’s also much easier to deal with nested collections of data</a:t>
+              <a:t>Braid makes it much easier to deal with nested collections </a:t>
             </a:r>
           </a:p>
           <a:p>
             <a:r>
               <a:rPr lang="en-US" dirty="0"/>
               <a:t>Because it’s interesting and fun (at least to me.)</a:t>
+            </a:r>
+          </a:p>
+          <a:p>
+            <a:r>
+              <a:rPr lang="en-US" dirty="0"/>
+              <a:t>Question: Do programming languages still matter?</a:t>
+            </a:r>
+          </a:p>
+          <a:p>
+            <a:pPr lvl="1"/>
+            <a:r>
+              <a:rPr lang="en-US" dirty="0"/>
+              <a:t>“Notation as a tool for thought”</a:t>
             </a:r>
           </a:p>
         </p:txBody>
@@ -6662,7 +6591,7 @@
         </p:spPr>
         <p:txBody>
           <a:bodyPr>
-            <a:normAutofit fontScale="85000" lnSpcReduction="20000"/>
+            <a:normAutofit fontScale="77500" lnSpcReduction="20000"/>
           </a:bodyPr>
           <a:lstStyle/>
           <a:p>
@@ -6672,18 +6601,18 @@
             </a:pPr>
             <a:r>
               <a:rPr lang="en-US" dirty="0"/>
-              <a:t>It is </a:t>
+              <a:t>It is expression-oriented</a:t>
             </a:r>
             <a:r>
               <a:rPr lang="en-US" i="1" dirty="0"/>
-              <a:t>expression-oriented and </a:t>
+              <a:t> and </a:t>
             </a:r>
             <a:r>
               <a:rPr lang="en-US" dirty="0"/>
               <a:t>everything is done with </a:t>
             </a:r>
             <a:r>
-              <a:rPr lang="en-US" b="1" i="1" dirty="0"/>
+              <a:rPr lang="en-US" b="1" dirty="0"/>
               <a:t>functions</a:t>
             </a:r>
           </a:p>
@@ -6698,15 +6627,11 @@
             </a:r>
             <a:r>
               <a:rPr lang="en-US" b="1" dirty="0"/>
-              <a:t> </a:t>
-            </a:r>
-            <a:r>
-              <a:rPr lang="en-US" b="1" i="1" dirty="0"/>
-              <a:t>symbols</a:t>
+              <a:t> symbols</a:t>
             </a:r>
             <a:r>
               <a:rPr lang="en-US" dirty="0"/>
-              <a:t> which serve the purpose of variable names</a:t>
+              <a:t> which serve the purpose of variable name identifiers</a:t>
             </a:r>
           </a:p>
           <a:p>
@@ -6760,7 +6685,7 @@
               <a:buChar char="§"/>
             </a:pPr>
             <a:r>
-              <a:rPr lang="en-US" b="1" i="1" dirty="0"/>
+              <a:rPr lang="en-US" b="1" dirty="0"/>
               <a:t>Code</a:t>
             </a:r>
             <a:r>
@@ -6768,7 +6693,7 @@
               <a:t> is represented as singly-linked </a:t>
             </a:r>
             <a:r>
-              <a:rPr lang="en-US" b="1" i="1" dirty="0"/>
+              <a:rPr lang="en-US" b="1" dirty="0"/>
               <a:t>lists</a:t>
             </a:r>
             <a:r>
@@ -7259,7 +7184,7 @@
             </a:r>
             <a:r>
               <a:rPr lang="en-US" sz="4000" dirty="0"/>
-              <a:t> - Mutable in size and values</a:t>
+              <a:t> - Mutable in size and values [1 2 3]</a:t>
             </a:r>
           </a:p>
           <a:p>
@@ -7602,7 +7527,21 @@
                 <a:latin typeface="Cascadia Code" panose="020B0609020000020004" pitchFamily="49" charset="0"/>
                 <a:cs typeface="Cascadia Code" panose="020B0609020000020004" pitchFamily="49" charset="0"/>
               </a:rPr>
-              <a:t>), Get-</a:t>
+              <a:t>),Get-</a:t>
+            </a:r>
+            <a:r>
+              <a:rPr lang="en-US" sz="2600" dirty="0" err="1">
+                <a:latin typeface="Cascadia Code" panose="020B0609020000020004" pitchFamily="49" charset="0"/>
+                <a:cs typeface="Cascadia Code" panose="020B0609020000020004" pitchFamily="49" charset="0"/>
+              </a:rPr>
+              <a:t>BraidSymbol</a:t>
+            </a:r>
+            <a:r>
+              <a:rPr lang="en-US" sz="2600" dirty="0">
+                <a:latin typeface="Cascadia Code" panose="020B0609020000020004" pitchFamily="49" charset="0"/>
+                <a:cs typeface="Cascadia Code" panose="020B0609020000020004" pitchFamily="49" charset="0"/>
+              </a:rPr>
+              <a:t>, Get-</a:t>
             </a:r>
             <a:r>
               <a:rPr lang="en-US" sz="2600" dirty="0" err="1">
@@ -9268,7 +9207,12 @@
             <p:ph idx="1"/>
           </p:nvPr>
         </p:nvSpPr>
-        <p:spPr/>
+        <p:spPr>
+          <a:xfrm>
+            <a:off x="838200" y="1608878"/>
+            <a:ext cx="10515600" cy="4351338"/>
+          </a:xfrm>
+        </p:spPr>
         <p:txBody>
           <a:bodyPr>
             <a:normAutofit/>
@@ -9329,15 +9273,6 @@
               </a:rPr>
               <a:t>.?length	# if “length” doesn’t exist, returns null</a:t>
             </a:r>
-          </a:p>
-          <a:p>
-            <a:pPr marL="457200" lvl="1" indent="0">
-              <a:buNone/>
-            </a:pPr>
-            <a:endParaRPr lang="en-US" sz="2400" dirty="0">
-              <a:latin typeface="Cascadia Code" panose="020B0609020000020004" pitchFamily="49" charset="0"/>
-              <a:cs typeface="Cascadia Code" panose="020B0609020000020004" pitchFamily="49" charset="0"/>
-            </a:endParaRPr>
           </a:p>
         </p:txBody>
       </p:sp>
@@ -9499,7 +9434,7 @@
           <a:p>
             <a:r>
               <a:rPr lang="en-US" dirty="0"/>
-              <a:t>No special conventions are needed; every function can be pipelined</a:t>
+              <a:t>No special notations are needed; every function can be pipelined</a:t>
             </a:r>
           </a:p>
           <a:p>
@@ -11607,119 +11542,12 @@
           <a:chExt cx="0" cy="0"/>
         </a:xfrm>
       </p:grpSpPr>
-      <p:sp>
-        <p:nvSpPr>
-          <p:cNvPr id="4" name="Titel 3">
+      <p:pic>
+        <p:nvPicPr>
+          <p:cNvPr id="2" name="Graphique 6">
             <a:extLst>
               <a:ext uri="{FF2B5EF4-FFF2-40B4-BE49-F238E27FC236}">
-                <a16:creationId xmlns:a16="http://schemas.microsoft.com/office/drawing/2014/main" id="{D531CB4D-40EE-4CEA-4C1F-A86C158A8A50}"/>
-              </a:ext>
-            </a:extLst>
-          </p:cNvPr>
-          <p:cNvSpPr>
-            <a:spLocks noGrp="1"/>
-          </p:cNvSpPr>
-          <p:nvPr>
-            <p:ph type="title" idx="4294967295"/>
-          </p:nvPr>
-        </p:nvSpPr>
-        <p:spPr>
-          <a:xfrm>
-            <a:off x="1009061" y="630961"/>
-            <a:ext cx="9733280" cy="1325563"/>
-          </a:xfrm>
-        </p:spPr>
-        <p:txBody>
-          <a:bodyPr/>
-          <a:lstStyle/>
-          <a:p>
-            <a:pPr rtl="0" eaLnBrk="1" latinLnBrk="0" hangingPunct="1"/>
-            <a:r>
-              <a:rPr lang="fr-FR" sz="4000" b="1" kern="1200" err="1">
-                <a:solidFill>
-                  <a:srgbClr val="3B2A47"/>
-                </a:solidFill>
-                <a:effectLst/>
-                <a:latin typeface="Calibri" panose="020F0502020204030204" pitchFamily="34" charset="0"/>
-                <a:ea typeface="+mn-ea"/>
-                <a:cs typeface="+mn-cs"/>
-              </a:rPr>
-              <a:t>Many</a:t>
-            </a:r>
-            <a:r>
-              <a:rPr lang="fr-FR" sz="4000" b="1" kern="1200">
-                <a:solidFill>
-                  <a:srgbClr val="3B2A47"/>
-                </a:solidFill>
-                <a:effectLst/>
-                <a:latin typeface="Calibri" panose="020F0502020204030204" pitchFamily="34" charset="0"/>
-                <a:ea typeface="+mn-ea"/>
-                <a:cs typeface="+mn-cs"/>
-              </a:rPr>
-              <a:t> </a:t>
-            </a:r>
-            <a:r>
-              <a:rPr lang="fr-FR" sz="4000" b="1" kern="1200" err="1">
-                <a:solidFill>
-                  <a:srgbClr val="3B2A47"/>
-                </a:solidFill>
-                <a:effectLst/>
-                <a:latin typeface="Calibri" panose="020F0502020204030204" pitchFamily="34" charset="0"/>
-                <a:ea typeface="+mn-ea"/>
-                <a:cs typeface="+mn-cs"/>
-              </a:rPr>
-              <a:t>thanks</a:t>
-            </a:r>
-            <a:r>
-              <a:rPr lang="fr-FR" sz="4000" b="1" kern="1200">
-                <a:solidFill>
-                  <a:srgbClr val="3B2A47"/>
-                </a:solidFill>
-                <a:effectLst/>
-                <a:latin typeface="Calibri" panose="020F0502020204030204" pitchFamily="34" charset="0"/>
-                <a:ea typeface="+mn-ea"/>
-                <a:cs typeface="+mn-cs"/>
-              </a:rPr>
-              <a:t> to </a:t>
-            </a:r>
-            <a:r>
-              <a:rPr lang="fr-FR" sz="4000" b="1" kern="1200" err="1">
-                <a:solidFill>
-                  <a:srgbClr val="3B2A47"/>
-                </a:solidFill>
-                <a:effectLst/>
-                <a:latin typeface="Calibri" panose="020F0502020204030204" pitchFamily="34" charset="0"/>
-                <a:ea typeface="+mn-ea"/>
-                <a:cs typeface="+mn-cs"/>
-              </a:rPr>
-              <a:t>our</a:t>
-            </a:r>
-            <a:r>
-              <a:rPr lang="fr-FR" sz="4000" b="1" kern="1200">
-                <a:solidFill>
-                  <a:srgbClr val="3B2A47"/>
-                </a:solidFill>
-                <a:effectLst/>
-                <a:latin typeface="Calibri" panose="020F0502020204030204" pitchFamily="34" charset="0"/>
-                <a:ea typeface="+mn-ea"/>
-                <a:cs typeface="+mn-cs"/>
-              </a:rPr>
-              <a:t> sponsors:</a:t>
-            </a:r>
-            <a:endParaRPr lang="en-DE">
-              <a:solidFill>
-                <a:srgbClr val="3B2A47"/>
-              </a:solidFill>
-            </a:endParaRPr>
-          </a:p>
-        </p:txBody>
-      </p:sp>
-      <p:pic>
-        <p:nvPicPr>
-          <p:cNvPr id="8" name="Graphique 7">
-            <a:extLst>
-              <a:ext uri="{FF2B5EF4-FFF2-40B4-BE49-F238E27FC236}">
-                <a16:creationId xmlns:a16="http://schemas.microsoft.com/office/drawing/2014/main" id="{C4BDF3A9-64A1-2EA9-AABD-6B9AFBACBB04}"/>
+                <a16:creationId xmlns:a16="http://schemas.microsoft.com/office/drawing/2014/main" id="{56B20C8F-B2CB-B1F9-8E7F-3897FE369D5D}"/>
               </a:ext>
             </a:extLst>
           </p:cNvPr>
@@ -11732,7 +11560,7 @@
           <a:blip>
             <a:extLst>
               <a:ext uri="{96DAC541-7B7A-43D3-8B79-37D633B846F1}">
-                <asvg:svgBlip xmlns:asvg="http://schemas.microsoft.com/office/drawing/2016/SVG/main" r:embed="rId3"/>
+                <asvg:svgBlip xmlns:asvg="http://schemas.microsoft.com/office/drawing/2016/SVG/main" r:embed="rId2"/>
               </a:ext>
             </a:extLst>
           </a:blip>
@@ -11742,18 +11570,84 @@
         </p:blipFill>
         <p:spPr>
           <a:xfrm>
-            <a:off x="1542212" y="2028538"/>
-            <a:ext cx="8666978" cy="3146276"/>
+            <a:off x="1336229" y="2340897"/>
+            <a:ext cx="8666977" cy="2650633"/>
           </a:xfrm>
           <a:prstGeom prst="rect">
             <a:avLst/>
           </a:prstGeom>
         </p:spPr>
       </p:pic>
+      <p:sp>
+        <p:nvSpPr>
+          <p:cNvPr id="3" name="Titel 3">
+            <a:extLst>
+              <a:ext uri="{FF2B5EF4-FFF2-40B4-BE49-F238E27FC236}">
+                <a16:creationId xmlns:a16="http://schemas.microsoft.com/office/drawing/2014/main" id="{E8D5F61D-8E53-AAB9-82E3-4B5C178B574B}"/>
+              </a:ext>
+            </a:extLst>
+          </p:cNvPr>
+          <p:cNvSpPr txBox="1">
+            <a:spLocks/>
+          </p:cNvSpPr>
+          <p:nvPr/>
+        </p:nvSpPr>
+        <p:spPr>
+          <a:xfrm>
+            <a:off x="1009061" y="630961"/>
+            <a:ext cx="9733280" cy="1325563"/>
+          </a:xfrm>
+          <a:prstGeom prst="rect">
+            <a:avLst/>
+          </a:prstGeom>
+        </p:spPr>
+        <p:txBody>
+          <a:bodyPr vert="horz" lIns="91440" tIns="45720" rIns="91440" bIns="45720" rtlCol="0" anchor="ctr">
+            <a:normAutofit/>
+          </a:bodyPr>
+          <a:lstStyle>
+            <a:lvl1pPr algn="l" defTabSz="914400" rtl="0" eaLnBrk="1" latinLnBrk="0" hangingPunct="1">
+              <a:lnSpc>
+                <a:spcPct val="90000"/>
+              </a:lnSpc>
+              <a:spcBef>
+                <a:spcPct val="0"/>
+              </a:spcBef>
+              <a:buNone/>
+              <a:defRPr sz="5400" b="1" kern="1200">
+                <a:solidFill>
+                  <a:srgbClr val="3B2B46"/>
+                </a:solidFill>
+                <a:latin typeface="+mj-lt"/>
+                <a:ea typeface="+mj-ea"/>
+                <a:cs typeface="+mj-cs"/>
+              </a:defRPr>
+            </a:lvl1pPr>
+          </a:lstStyle>
+          <a:p>
+            <a:r>
+              <a:rPr lang="fr-FR" sz="4000">
+                <a:solidFill>
+                  <a:srgbClr val="3B2A47"/>
+                </a:solidFill>
+                <a:latin typeface="Calibri" panose="020F0502020204030204" pitchFamily="34" charset="0"/>
+                <a:ea typeface="+mn-ea"/>
+                <a:cs typeface="+mn-cs"/>
+              </a:rPr>
+              <a:t>Many thanks to our sponsors:</a:t>
+            </a:r>
+            <a:endParaRPr lang="en-DE" dirty="0">
+              <a:solidFill>
+                <a:srgbClr val="3B2A47"/>
+              </a:solidFill>
+            </a:endParaRPr>
+          </a:p>
+        </p:txBody>
+      </p:sp>
     </p:spTree>
     <p:extLst>
       <p:ext uri="{BB962C8B-B14F-4D97-AF65-F5344CB8AC3E}">
-        <p14:creationId xmlns:p14="http://schemas.microsoft.com/office/powerpoint/2010/main" val="3984835757"/>
+        <p14:creationId xmlns:p14="http://schemas.microsoft.com/office/powerpoint/2010/main" val="3387779289"/>
       </p:ext>
     </p:extLst>
   </p:cSld>
@@ -14369,15 +14263,6 @@
 </file>
 
 <file path=customXml/item2.xml><?xml version="1.0" encoding="utf-8"?>
-<?mso-contentType ?>
-<FormTemplates xmlns="http://schemas.microsoft.com/sharepoint/v3/contenttype/forms">
-  <Display>DocumentLibraryForm</Display>
-  <Edit>DocumentLibraryForm</Edit>
-  <New>DocumentLibraryForm</New>
-</FormTemplates>
-</file>
-
-<file path=customXml/item3.xml><?xml version="1.0" encoding="utf-8"?>
 <p:properties xmlns:p="http://schemas.microsoft.com/office/2006/metadata/properties" xmlns:xsi="http://www.w3.org/2001/XMLSchema-instance" xmlns:pc="http://schemas.microsoft.com/office/infopath/2007/PartnerControls">
   <documentManagement>
     <lcf76f155ced4ddcb4097134ff3c332f xmlns="abdc9a1f-962e-4235-838d-61f9c438f4db">
@@ -14386,6 +14271,15 @@
     <TaxCatchAll xmlns="de47e97d-64fd-4aef-b10e-fd7d6cfcfcf4" xsi:nil="true"/>
   </documentManagement>
 </p:properties>
+</file>
+
+<file path=customXml/item3.xml><?xml version="1.0" encoding="utf-8"?>
+<?mso-contentType ?>
+<FormTemplates xmlns="http://schemas.microsoft.com/sharepoint/v3/contenttype/forms">
+  <Display>DocumentLibraryForm</Display>
+  <Edit>DocumentLibraryForm</Edit>
+  <New>DocumentLibraryForm</New>
+</FormTemplates>
 </file>
 
 <file path=customXml/itemProps1.xml><?xml version="1.0" encoding="utf-8"?>
@@ -14408,14 +14302,6 @@
 </file>
 
 <file path=customXml/itemProps2.xml><?xml version="1.0" encoding="utf-8"?>
-<ds:datastoreItem xmlns:ds="http://schemas.openxmlformats.org/officeDocument/2006/customXml" ds:itemID="{57D9B22B-F436-4FE5-B6C0-65AB2260F593}">
-  <ds:schemaRefs>
-    <ds:schemaRef ds:uri="http://schemas.microsoft.com/sharepoint/v3/contenttype/forms"/>
-  </ds:schemaRefs>
-</ds:datastoreItem>
-</file>
-
-<file path=customXml/itemProps3.xml><?xml version="1.0" encoding="utf-8"?>
 <ds:datastoreItem xmlns:ds="http://schemas.openxmlformats.org/officeDocument/2006/customXml" ds:itemID="{AA9C06E3-346E-408E-B352-32E922A070CE}">
   <ds:schemaRefs>
     <ds:schemaRef ds:uri="2347cc20-e10c-452d-848a-c18e83138525"/>
@@ -14428,4 +14314,12 @@
     <ds:schemaRef ds:uri="http://schemas.microsoft.com/office/infopath/2007/PartnerControls"/>
   </ds:schemaRefs>
 </ds:datastoreItem>
+</file>
+
+<file path=customXml/itemProps3.xml><?xml version="1.0" encoding="utf-8"?>
+<ds:datastoreItem xmlns:ds="http://schemas.openxmlformats.org/officeDocument/2006/customXml" ds:itemID="{57D9B22B-F436-4FE5-B6C0-65AB2260F593}">
+  <ds:schemaRefs>
+    <ds:schemaRef ds:uri="http://schemas.microsoft.com/sharepoint/v3/contenttype/forms"/>
+  </ds:schemaRefs>
+</ds:datastoreItem>
 </file>
--- a/PSCONF26_Payette_Leveraging_Braid.pptx
+++ b/PSCONF26_Payette_Leveraging_Braid.pptx
@@ -8,10 +8,10 @@
     <p:sldMasterId id="2147483684" r:id="rId7"/>
   </p:sldMasterIdLst>
   <p:notesMasterIdLst>
-    <p:notesMasterId r:id="rId36"/>
+    <p:notesMasterId r:id="rId37"/>
   </p:notesMasterIdLst>
   <p:handoutMasterIdLst>
-    <p:handoutMasterId r:id="rId37"/>
+    <p:handoutMasterId r:id="rId38"/>
   </p:handoutMasterIdLst>
   <p:sldIdLst>
     <p:sldId id="272" r:id="rId8"/>
@@ -24,24 +24,25 @@
     <p:sldId id="260" r:id="rId15"/>
     <p:sldId id="285" r:id="rId16"/>
     <p:sldId id="284" r:id="rId17"/>
-    <p:sldId id="291" r:id="rId18"/>
-    <p:sldId id="275" r:id="rId19"/>
-    <p:sldId id="281" r:id="rId20"/>
-    <p:sldId id="286" r:id="rId21"/>
-    <p:sldId id="276" r:id="rId22"/>
-    <p:sldId id="278" r:id="rId23"/>
-    <p:sldId id="279" r:id="rId24"/>
-    <p:sldId id="277" r:id="rId25"/>
-    <p:sldId id="290" r:id="rId26"/>
-    <p:sldId id="280" r:id="rId27"/>
-    <p:sldId id="283" r:id="rId28"/>
-    <p:sldId id="288" r:id="rId29"/>
-    <p:sldId id="282" r:id="rId30"/>
-    <p:sldId id="264" r:id="rId31"/>
-    <p:sldId id="287" r:id="rId32"/>
-    <p:sldId id="292" r:id="rId33"/>
-    <p:sldId id="265" r:id="rId34"/>
-    <p:sldId id="274" r:id="rId35"/>
+    <p:sldId id="294" r:id="rId18"/>
+    <p:sldId id="291" r:id="rId19"/>
+    <p:sldId id="275" r:id="rId20"/>
+    <p:sldId id="281" r:id="rId21"/>
+    <p:sldId id="286" r:id="rId22"/>
+    <p:sldId id="276" r:id="rId23"/>
+    <p:sldId id="278" r:id="rId24"/>
+    <p:sldId id="279" r:id="rId25"/>
+    <p:sldId id="277" r:id="rId26"/>
+    <p:sldId id="290" r:id="rId27"/>
+    <p:sldId id="280" r:id="rId28"/>
+    <p:sldId id="283" r:id="rId29"/>
+    <p:sldId id="288" r:id="rId30"/>
+    <p:sldId id="282" r:id="rId31"/>
+    <p:sldId id="264" r:id="rId32"/>
+    <p:sldId id="287" r:id="rId33"/>
+    <p:sldId id="292" r:id="rId34"/>
+    <p:sldId id="265" r:id="rId35"/>
+    <p:sldId id="274" r:id="rId36"/>
   </p:sldIdLst>
   <p:sldSz cx="12192000" cy="6858000"/>
   <p:notesSz cx="6858000" cy="9144000"/>
@@ -159,6 +160,7 @@
             <p14:sldId id="260"/>
             <p14:sldId id="285"/>
             <p14:sldId id="284"/>
+            <p14:sldId id="294"/>
             <p14:sldId id="291"/>
             <p14:sldId id="275"/>
             <p14:sldId id="281"/>
@@ -397,7 +399,7 @@
           <a:p>
             <a:fld id="{69440670-43D7-400A-ABC5-B69E064DBB37}" type="datetimeFigureOut">
               <a:rPr lang="en-GB" smtClean="0"/>
-              <a:t>01/06/2026</a:t>
+              <a:t>02/06/2026</a:t>
             </a:fld>
             <a:endParaRPr lang="en-GB"/>
           </a:p>
@@ -574,7 +576,7 @@
           <a:p>
             <a:fld id="{611B03A4-75C9-4E3D-9183-2102CA9AEC33}" type="datetimeFigureOut">
               <a:rPr lang="en-GB" smtClean="0"/>
-              <a:t>01/06/2026</a:t>
+              <a:t>02/06/2026</a:t>
             </a:fld>
             <a:endParaRPr lang="en-GB"/>
           </a:p>
@@ -1438,7 +1440,7 @@
           <a:p>
             <a:fld id="{A7839206-A81D-4F76-8486-302187992F73}" type="slidenum">
               <a:rPr lang="en-GB" smtClean="0"/>
-              <a:t>12</a:t>
+              <a:t>13</a:t>
             </a:fld>
             <a:endParaRPr lang="en-GB"/>
           </a:p>
@@ -1522,7 +1524,7 @@
           <a:p>
             <a:fld id="{A7839206-A81D-4F76-8486-302187992F73}" type="slidenum">
               <a:rPr lang="en-GB" smtClean="0"/>
-              <a:t>28</a:t>
+              <a:t>29</a:t>
             </a:fld>
             <a:endParaRPr lang="en-GB"/>
           </a:p>
@@ -6035,13 +6037,13 @@
         </p:nvSpPr>
         <p:spPr>
           <a:xfrm>
-            <a:off x="589430" y="989548"/>
-            <a:ext cx="10515600" cy="5265525"/>
+            <a:off x="589430" y="989549"/>
+            <a:ext cx="10515600" cy="5243164"/>
           </a:xfrm>
         </p:spPr>
         <p:txBody>
           <a:bodyPr>
-            <a:normAutofit fontScale="92500"/>
+            <a:normAutofit fontScale="92500" lnSpcReduction="20000"/>
           </a:bodyPr>
           <a:lstStyle/>
           <a:p>
@@ -6065,7 +6067,7 @@
                 <a:latin typeface="Cascadia Code" panose="020B0609020000020004" pitchFamily="49" charset="0"/>
                 <a:cs typeface="Cascadia Code" panose="020B0609020000020004" pitchFamily="49" charset="0"/>
               </a:rPr>
-              <a:t>    time {$data | sort | out-null}   # takes 14.44 </a:t>
+              <a:t>    time {$data | sort-object | out-null} # takes 14.44 </a:t>
             </a:r>
             <a:r>
               <a:rPr lang="en-US" sz="2400" dirty="0" err="1">
@@ -6102,7 +6104,7 @@
                 <a:latin typeface="Cascadia Code" panose="020B0609020000020004" pitchFamily="49" charset="0"/>
                 <a:cs typeface="Cascadia Code" panose="020B0609020000020004" pitchFamily="49" charset="0"/>
               </a:rPr>
-              <a:t> sort $data | out-null} # takes only 4.54 </a:t>
+              <a:t> sort $data | out-null}      # takes only 4.54 </a:t>
             </a:r>
             <a:r>
               <a:rPr lang="en-US" sz="2400" dirty="0" err="1">
@@ -6119,13 +6121,13 @@
           <a:p>
             <a:r>
               <a:rPr lang="en-US" dirty="0"/>
-              <a:t>Braid makes it much easier to deal with nested collections </a:t>
-            </a:r>
-          </a:p>
-          <a:p>
-            <a:r>
-              <a:rPr lang="en-US" dirty="0"/>
-              <a:t>Because it’s interesting and fun (at least to me.)</a:t>
+              <a:t>Braid also makes it much easier to deal with nested collections </a:t>
+            </a:r>
+          </a:p>
+          <a:p>
+            <a:r>
+              <a:rPr lang="en-US" i="1" dirty="0"/>
+              <a:t>You can use Braid from PowerShell without knowing the language.</a:t>
             </a:r>
           </a:p>
           <a:p>
@@ -6138,8 +6140,11 @@
             <a:pPr lvl="1"/>
             <a:r>
               <a:rPr lang="en-US" dirty="0"/>
-              <a:t>“Notation as a tool for thought”</a:t>
-            </a:r>
+              <a:t>Kenneth Iverson “Notation as a Tool for Thought”</a:t>
+            </a:r>
+          </a:p>
+          <a:p>
+            <a:endParaRPr lang="en-US" i="1" dirty="0"/>
           </a:p>
         </p:txBody>
       </p:sp>
@@ -6157,6 +6162,141 @@
 </file>
 
 <file path=ppt/slides/slide11.xml><?xml version="1.0" encoding="utf-8"?>
+<p:sld xmlns:a="http://schemas.openxmlformats.org/drawingml/2006/main" xmlns:r="http://schemas.openxmlformats.org/officeDocument/2006/relationships" xmlns:p="http://schemas.openxmlformats.org/presentationml/2006/main">
+  <p:cSld>
+    <p:spTree>
+      <p:nvGrpSpPr>
+        <p:cNvPr id="1" name=""/>
+        <p:cNvGrpSpPr/>
+        <p:nvPr/>
+      </p:nvGrpSpPr>
+      <p:grpSpPr>
+        <a:xfrm>
+          <a:off x="0" y="0"/>
+          <a:ext cx="0" cy="0"/>
+          <a:chOff x="0" y="0"/>
+          <a:chExt cx="0" cy="0"/>
+        </a:xfrm>
+      </p:grpSpPr>
+      <p:sp>
+        <p:nvSpPr>
+          <p:cNvPr id="2" name="Title 1">
+            <a:extLst>
+              <a:ext uri="{FF2B5EF4-FFF2-40B4-BE49-F238E27FC236}">
+                <a16:creationId xmlns:a16="http://schemas.microsoft.com/office/drawing/2014/main" id="{6C4CB489-56D6-DF2E-8D4A-73F204E37A08}"/>
+              </a:ext>
+            </a:extLst>
+          </p:cNvPr>
+          <p:cNvSpPr>
+            <a:spLocks noGrp="1"/>
+          </p:cNvSpPr>
+          <p:nvPr>
+            <p:ph type="title"/>
+          </p:nvPr>
+        </p:nvSpPr>
+        <p:spPr/>
+        <p:txBody>
+          <a:bodyPr>
+            <a:normAutofit/>
+          </a:bodyPr>
+          <a:lstStyle/>
+          <a:p>
+            <a:r>
+              <a:rPr lang="en-US" sz="4400"/>
+              <a:t>Why Use Lisp as a Base?</a:t>
+            </a:r>
+            <a:endParaRPr lang="en-US" sz="4400" dirty="0"/>
+          </a:p>
+        </p:txBody>
+      </p:sp>
+      <p:sp>
+        <p:nvSpPr>
+          <p:cNvPr id="3" name="Content Placeholder 2">
+            <a:extLst>
+              <a:ext uri="{FF2B5EF4-FFF2-40B4-BE49-F238E27FC236}">
+                <a16:creationId xmlns:a16="http://schemas.microsoft.com/office/drawing/2014/main" id="{A698BDC9-9BC5-AA8F-3A41-9D25DE771A1E}"/>
+              </a:ext>
+            </a:extLst>
+          </p:cNvPr>
+          <p:cNvSpPr>
+            <a:spLocks noGrp="1"/>
+          </p:cNvSpPr>
+          <p:nvPr>
+            <p:ph idx="1"/>
+          </p:nvPr>
+        </p:nvSpPr>
+        <p:spPr>
+          <a:xfrm>
+            <a:off x="838200" y="1519518"/>
+            <a:ext cx="10515600" cy="4657445"/>
+          </a:xfrm>
+        </p:spPr>
+        <p:txBody>
+          <a:bodyPr>
+            <a:normAutofit fontScale="92500" lnSpcReduction="10000"/>
+          </a:bodyPr>
+          <a:lstStyle/>
+          <a:p>
+            <a:r>
+              <a:rPr lang="en-US" dirty="0"/>
+              <a:t>Code is data</a:t>
+            </a:r>
+          </a:p>
+          <a:p>
+            <a:r>
+              <a:rPr lang="en-US" dirty="0"/>
+              <a:t>Easy to write programs that inspect and manipulate programs</a:t>
+            </a:r>
+          </a:p>
+          <a:p>
+            <a:pPr lvl="1"/>
+            <a:r>
+              <a:rPr lang="en-US" dirty="0"/>
+              <a:t>Including running programs</a:t>
+            </a:r>
+          </a:p>
+          <a:p>
+            <a:r>
+              <a:rPr lang="en-US" dirty="0"/>
+              <a:t>1:1 relationship between code and the source representation.</a:t>
+            </a:r>
+          </a:p>
+          <a:p>
+            <a:pPr lvl="1"/>
+            <a:r>
+              <a:rPr lang="en-US" dirty="0"/>
+              <a:t>This means that applications can read a file, manipulate the data structure then save the mutated file back.</a:t>
+            </a:r>
+          </a:p>
+          <a:p>
+            <a:pPr lvl="1"/>
+            <a:r>
+              <a:rPr lang="en-US" dirty="0"/>
+              <a:t>Ideal for configuration files (consider vs XML)</a:t>
+            </a:r>
+          </a:p>
+          <a:p>
+            <a:r>
+              <a:rPr lang="en-US" dirty="0"/>
+              <a:t>Supports UI over code effectively: objects not strings</a:t>
+            </a:r>
+          </a:p>
+        </p:txBody>
+      </p:sp>
+    </p:spTree>
+    <p:extLst>
+      <p:ext uri="{BB962C8B-B14F-4D97-AF65-F5344CB8AC3E}">
+        <p14:creationId xmlns:p14="http://schemas.microsoft.com/office/powerpoint/2010/main" val="1149753337"/>
+      </p:ext>
+    </p:extLst>
+  </p:cSld>
+  <p:clrMapOvr>
+    <a:masterClrMapping/>
+  </p:clrMapOvr>
+</p:sld>
+</file>
+
+<file path=ppt/slides/slide12.xml><?xml version="1.0" encoding="utf-8"?>
 <p:sld xmlns:a="http://schemas.openxmlformats.org/drawingml/2006/main" xmlns:r="http://schemas.openxmlformats.org/officeDocument/2006/relationships" xmlns:p="http://schemas.openxmlformats.org/presentationml/2006/main">
   <p:cSld>
     <p:spTree>
@@ -6513,7 +6653,7 @@
 </p:sld>
 </file>
 
-<file path=ppt/slides/slide12.xml><?xml version="1.0" encoding="utf-8"?>
+<file path=ppt/slides/slide13.xml><?xml version="1.0" encoding="utf-8"?>
 <p:sld xmlns:a="http://schemas.openxmlformats.org/drawingml/2006/main" xmlns:r="http://schemas.openxmlformats.org/officeDocument/2006/relationships" xmlns:p="http://schemas.openxmlformats.org/presentationml/2006/main">
   <p:cSld>
     <p:spTree>
@@ -6614,6 +6754,13 @@
             <a:r>
               <a:rPr lang="en-US" b="1" dirty="0"/>
               <a:t>functions</a:t>
+            </a:r>
+          </a:p>
+          <a:p>
+            <a:pPr lvl="1"/>
+            <a:r>
+              <a:rPr lang="en-US" dirty="0"/>
+              <a:t>Including control structures like if and while </a:t>
             </a:r>
           </a:p>
           <a:p>
@@ -6889,7 +7036,7 @@
 </p:sld>
 </file>
 
-<file path=ppt/slides/slide13.xml><?xml version="1.0" encoding="utf-8"?>
+<file path=ppt/slides/slide14.xml><?xml version="1.0" encoding="utf-8"?>
 <p:sld xmlns:a="http://schemas.openxmlformats.org/drawingml/2006/main" xmlns:r="http://schemas.openxmlformats.org/officeDocument/2006/relationships" xmlns:p="http://schemas.openxmlformats.org/presentationml/2006/main">
   <p:cSld>
     <p:spTree>
@@ -7098,7 +7245,7 @@
 </p:sld>
 </file>
 
-<file path=ppt/slides/slide14.xml><?xml version="1.0" encoding="utf-8"?>
+<file path=ppt/slides/slide15.xml><?xml version="1.0" encoding="utf-8"?>
 <p:sld xmlns:a="http://schemas.openxmlformats.org/drawingml/2006/main" xmlns:r="http://schemas.openxmlformats.org/officeDocument/2006/relationships" xmlns:p="http://schemas.openxmlformats.org/presentationml/2006/main">
   <p:cSld>
     <p:spTree>
@@ -7345,7 +7492,7 @@
 </p:sld>
 </file>
 
-<file path=ppt/slides/slide15.xml><?xml version="1.0" encoding="utf-8"?>
+<file path=ppt/slides/slide16.xml><?xml version="1.0" encoding="utf-8"?>
 <p:sld xmlns:a="http://schemas.openxmlformats.org/drawingml/2006/main" xmlns:r="http://schemas.openxmlformats.org/officeDocument/2006/relationships" xmlns:p="http://schemas.openxmlformats.org/presentationml/2006/main">
   <p:cSld>
     <p:spTree>
@@ -7615,7 +7762,7 @@
 </p:sld>
 </file>
 
-<file path=ppt/slides/slide16.xml><?xml version="1.0" encoding="utf-8"?>
+<file path=ppt/slides/slide17.xml><?xml version="1.0" encoding="utf-8"?>
 <p:sld xmlns:a="http://schemas.openxmlformats.org/drawingml/2006/main" xmlns:r="http://schemas.openxmlformats.org/officeDocument/2006/relationships" xmlns:p="http://schemas.openxmlformats.org/presentationml/2006/main">
   <p:cSld>
     <p:spTree>
@@ -7984,7 +8131,7 @@
 </p:sld>
 </file>
 
-<file path=ppt/slides/slide17.xml><?xml version="1.0" encoding="utf-8"?>
+<file path=ppt/slides/slide18.xml><?xml version="1.0" encoding="utf-8"?>
 <p:sld xmlns:a="http://schemas.openxmlformats.org/drawingml/2006/main" xmlns:r="http://schemas.openxmlformats.org/officeDocument/2006/relationships" xmlns:p="http://schemas.openxmlformats.org/presentationml/2006/main">
   <p:cSld>
     <p:spTree>
@@ -8184,7 +8331,7 @@
 </p:sld>
 </file>
 
-<file path=ppt/slides/slide18.xml><?xml version="1.0" encoding="utf-8"?>
+<file path=ppt/slides/slide19.xml><?xml version="1.0" encoding="utf-8"?>
 <p:sld xmlns:a="http://schemas.openxmlformats.org/drawingml/2006/main" xmlns:r="http://schemas.openxmlformats.org/officeDocument/2006/relationships" xmlns:p="http://schemas.openxmlformats.org/presentationml/2006/main">
   <p:cSld>
     <p:spTree>
@@ -8602,405 +8749,6 @@
     <p:extLst>
       <p:ext uri="{BB962C8B-B14F-4D97-AF65-F5344CB8AC3E}">
         <p14:creationId xmlns:p14="http://schemas.microsoft.com/office/powerpoint/2010/main" val="1572988263"/>
-      </p:ext>
-    </p:extLst>
-  </p:cSld>
-  <p:clrMapOvr>
-    <a:masterClrMapping/>
-  </p:clrMapOvr>
-</p:sld>
-</file>
-
-<file path=ppt/slides/slide19.xml><?xml version="1.0" encoding="utf-8"?>
-<p:sld xmlns:a="http://schemas.openxmlformats.org/drawingml/2006/main" xmlns:r="http://schemas.openxmlformats.org/officeDocument/2006/relationships" xmlns:p="http://schemas.openxmlformats.org/presentationml/2006/main">
-  <p:cSld>
-    <p:spTree>
-      <p:nvGrpSpPr>
-        <p:cNvPr id="1" name=""/>
-        <p:cNvGrpSpPr/>
-        <p:nvPr/>
-      </p:nvGrpSpPr>
-      <p:grpSpPr>
-        <a:xfrm>
-          <a:off x="0" y="0"/>
-          <a:ext cx="0" cy="0"/>
-          <a:chOff x="0" y="0"/>
-          <a:chExt cx="0" cy="0"/>
-        </a:xfrm>
-      </p:grpSpPr>
-      <p:sp>
-        <p:nvSpPr>
-          <p:cNvPr id="2" name="Title 1">
-            <a:extLst>
-              <a:ext uri="{FF2B5EF4-FFF2-40B4-BE49-F238E27FC236}">
-                <a16:creationId xmlns:a16="http://schemas.microsoft.com/office/drawing/2014/main" id="{C942EC84-F29C-42EA-0185-60E58BF66ACB}"/>
-              </a:ext>
-            </a:extLst>
-          </p:cNvPr>
-          <p:cNvSpPr>
-            <a:spLocks noGrp="1"/>
-          </p:cNvSpPr>
-          <p:nvPr>
-            <p:ph type="title"/>
-          </p:nvPr>
-        </p:nvSpPr>
-        <p:spPr/>
-        <p:txBody>
-          <a:bodyPr>
-            <a:normAutofit/>
-          </a:bodyPr>
-          <a:lstStyle/>
-          <a:p>
-            <a:r>
-              <a:rPr lang="en-US" sz="4000" dirty="0"/>
-              <a:t>Accessing .NET from Braid</a:t>
-            </a:r>
-          </a:p>
-        </p:txBody>
-      </p:sp>
-      <p:sp>
-        <p:nvSpPr>
-          <p:cNvPr id="3" name="Content Placeholder 2">
-            <a:extLst>
-              <a:ext uri="{FF2B5EF4-FFF2-40B4-BE49-F238E27FC236}">
-                <a16:creationId xmlns:a16="http://schemas.microsoft.com/office/drawing/2014/main" id="{5CA2FC57-0920-6942-B057-66EFDAC868AD}"/>
-              </a:ext>
-            </a:extLst>
-          </p:cNvPr>
-          <p:cNvSpPr>
-            <a:spLocks noGrp="1"/>
-          </p:cNvSpPr>
-          <p:nvPr>
-            <p:ph idx="1"/>
-          </p:nvPr>
-        </p:nvSpPr>
-        <p:spPr/>
-        <p:txBody>
-          <a:bodyPr>
-            <a:normAutofit fontScale="92500" lnSpcReduction="10000"/>
-          </a:bodyPr>
-          <a:lstStyle/>
-          <a:p>
-            <a:r>
-              <a:rPr lang="en-US" sz="3900" dirty="0"/>
-              <a:t>Types start with a caret, casts use types like functions</a:t>
-            </a:r>
-          </a:p>
-          <a:p>
-            <a:pPr marL="457200" lvl="1" indent="0">
-              <a:buNone/>
-            </a:pPr>
-            <a:r>
-              <a:rPr lang="en-US" sz="2600" dirty="0">
-                <a:latin typeface="Cascadia Code" panose="020B0609020000020004" pitchFamily="49" charset="0"/>
-                <a:cs typeface="Cascadia Code" panose="020B0609020000020004" pitchFamily="49" charset="0"/>
-              </a:rPr>
-              <a:t>^int ^List[int]</a:t>
-            </a:r>
-          </a:p>
-          <a:p>
-            <a:pPr marL="457200" lvl="1" indent="0">
-              <a:buNone/>
-            </a:pPr>
-            <a:r>
-              <a:rPr lang="en-US" sz="2600" dirty="0">
-                <a:latin typeface="Cascadia Code" panose="020B0609020000020004" pitchFamily="49" charset="0"/>
-                <a:cs typeface="Cascadia Code" panose="020B0609020000020004" pitchFamily="49" charset="0"/>
-              </a:rPr>
-              <a:t>(^int? </a:t>
-            </a:r>
-            <a:r>
-              <a:rPr lang="en-US" sz="2800" dirty="0">
-                <a:latin typeface="Cascadia Code" panose="020B0609020000020004" pitchFamily="49" charset="0"/>
-                <a:cs typeface="Cascadia Code" panose="020B0609020000020004" pitchFamily="49" charset="0"/>
-              </a:rPr>
-              <a:t>"</a:t>
-            </a:r>
-            <a:r>
-              <a:rPr lang="en-US" sz="2600" dirty="0">
-                <a:latin typeface="Cascadia Code" panose="020B0609020000020004" pitchFamily="49" charset="0"/>
-                <a:cs typeface="Cascadia Code" panose="020B0609020000020004" pitchFamily="49" charset="0"/>
-              </a:rPr>
-              <a:t>23</a:t>
-            </a:r>
-            <a:r>
-              <a:rPr lang="en-US" sz="2800" dirty="0">
-                <a:latin typeface="Cascadia Code" panose="020B0609020000020004" pitchFamily="49" charset="0"/>
-                <a:cs typeface="Cascadia Code" panose="020B0609020000020004" pitchFamily="49" charset="0"/>
-              </a:rPr>
-              <a:t>"</a:t>
-            </a:r>
-            <a:r>
-              <a:rPr lang="en-US" sz="2600" dirty="0">
-                <a:latin typeface="Cascadia Code" panose="020B0609020000020004" pitchFamily="49" charset="0"/>
-                <a:cs typeface="Cascadia Code" panose="020B0609020000020004" pitchFamily="49" charset="0"/>
-              </a:rPr>
-              <a:t>)  ; cast string to int</a:t>
-            </a:r>
-          </a:p>
-          <a:p>
-            <a:r>
-              <a:rPr lang="en-US" sz="3900" dirty="0"/>
-              <a:t>Properties and methods are used like functions</a:t>
-            </a:r>
-          </a:p>
-          <a:p>
-            <a:pPr marL="457200" lvl="1" indent="0">
-              <a:buNone/>
-            </a:pPr>
-            <a:r>
-              <a:rPr lang="en-US" sz="2600" dirty="0">
-                <a:latin typeface="Cascadia Code" panose="020B0609020000020004" pitchFamily="49" charset="0"/>
-                <a:cs typeface="Cascadia Code" panose="020B0609020000020004" pitchFamily="49" charset="0"/>
-              </a:rPr>
-              <a:t>(.Length </a:t>
-            </a:r>
-            <a:r>
-              <a:rPr lang="en-US" sz="2800" dirty="0">
-                <a:latin typeface="Cascadia Code" panose="020B0609020000020004" pitchFamily="49" charset="0"/>
-                <a:cs typeface="Cascadia Code" panose="020B0609020000020004" pitchFamily="49" charset="0"/>
-              </a:rPr>
-              <a:t>"</a:t>
-            </a:r>
-            <a:r>
-              <a:rPr lang="en-US" sz="2600" dirty="0" err="1">
-                <a:latin typeface="Cascadia Code" panose="020B0609020000020004" pitchFamily="49" charset="0"/>
-                <a:cs typeface="Cascadia Code" panose="020B0609020000020004" pitchFamily="49" charset="0"/>
-              </a:rPr>
-              <a:t>abc</a:t>
-            </a:r>
-            <a:r>
-              <a:rPr lang="en-US" sz="2800" dirty="0">
-                <a:latin typeface="Cascadia Code" panose="020B0609020000020004" pitchFamily="49" charset="0"/>
-                <a:cs typeface="Cascadia Code" panose="020B0609020000020004" pitchFamily="49" charset="0"/>
-              </a:rPr>
-              <a:t>"</a:t>
-            </a:r>
-            <a:r>
-              <a:rPr lang="en-US" sz="2600" dirty="0">
-                <a:latin typeface="Cascadia Code" panose="020B0609020000020004" pitchFamily="49" charset="0"/>
-                <a:cs typeface="Cascadia Code" panose="020B0609020000020004" pitchFamily="49" charset="0"/>
-              </a:rPr>
-              <a:t>) 			; returns 3</a:t>
-            </a:r>
-          </a:p>
-          <a:p>
-            <a:pPr marL="457200" lvl="1" indent="0">
-              <a:buNone/>
-            </a:pPr>
-            <a:r>
-              <a:rPr lang="en-US" sz="2600" dirty="0">
-                <a:latin typeface="Cascadia Code" panose="020B0609020000020004" pitchFamily="49" charset="0"/>
-                <a:cs typeface="Cascadia Code" panose="020B0609020000020004" pitchFamily="49" charset="0"/>
-              </a:rPr>
-              <a:t>(.Substring </a:t>
-            </a:r>
-            <a:r>
-              <a:rPr lang="en-US" sz="2800" dirty="0">
-                <a:latin typeface="Cascadia Code" panose="020B0609020000020004" pitchFamily="49" charset="0"/>
-                <a:cs typeface="Cascadia Code" panose="020B0609020000020004" pitchFamily="49" charset="0"/>
-              </a:rPr>
-              <a:t>"</a:t>
-            </a:r>
-            <a:r>
-              <a:rPr lang="en-US" sz="2600" dirty="0">
-                <a:latin typeface="Cascadia Code" panose="020B0609020000020004" pitchFamily="49" charset="0"/>
-                <a:cs typeface="Cascadia Code" panose="020B0609020000020004" pitchFamily="49" charset="0"/>
-              </a:rPr>
-              <a:t>hello</a:t>
-            </a:r>
-            <a:r>
-              <a:rPr lang="en-US" sz="2800" dirty="0">
-                <a:latin typeface="Cascadia Code" panose="020B0609020000020004" pitchFamily="49" charset="0"/>
-                <a:cs typeface="Cascadia Code" panose="020B0609020000020004" pitchFamily="49" charset="0"/>
-              </a:rPr>
-              <a:t>"</a:t>
-            </a:r>
-            <a:r>
-              <a:rPr lang="en-US" sz="2600" dirty="0">
-                <a:latin typeface="Cascadia Code" panose="020B0609020000020004" pitchFamily="49" charset="0"/>
-                <a:cs typeface="Cascadia Code" panose="020B0609020000020004" pitchFamily="49" charset="0"/>
-              </a:rPr>
-              <a:t> 1) 	; returns </a:t>
-            </a:r>
-            <a:r>
-              <a:rPr lang="en-US" sz="2800" dirty="0">
-                <a:solidFill>
-                  <a:schemeClr val="accent1"/>
-                </a:solidFill>
-                <a:latin typeface="Cascadia Code" panose="020B0609020000020004" pitchFamily="49" charset="0"/>
-                <a:cs typeface="Cascadia Code" panose="020B0609020000020004" pitchFamily="49" charset="0"/>
-              </a:rPr>
-              <a:t>"</a:t>
-            </a:r>
-            <a:r>
-              <a:rPr lang="en-US" sz="2600" dirty="0" err="1">
-                <a:latin typeface="Cascadia Code" panose="020B0609020000020004" pitchFamily="49" charset="0"/>
-                <a:cs typeface="Cascadia Code" panose="020B0609020000020004" pitchFamily="49" charset="0"/>
-              </a:rPr>
-              <a:t>ello</a:t>
-            </a:r>
-            <a:r>
-              <a:rPr lang="en-US" sz="2800" dirty="0">
-                <a:solidFill>
-                  <a:schemeClr val="accent1"/>
-                </a:solidFill>
-                <a:latin typeface="Cascadia Code" panose="020B0609020000020004" pitchFamily="49" charset="0"/>
-                <a:cs typeface="Cascadia Code" panose="020B0609020000020004" pitchFamily="49" charset="0"/>
-              </a:rPr>
-              <a:t>"</a:t>
-            </a:r>
-            <a:endParaRPr lang="en-US" sz="2600" dirty="0">
-              <a:latin typeface="Cascadia Code" panose="020B0609020000020004" pitchFamily="49" charset="0"/>
-              <a:cs typeface="Cascadia Code" panose="020B0609020000020004" pitchFamily="49" charset="0"/>
-            </a:endParaRPr>
-          </a:p>
-          <a:p>
-            <a:pPr marL="457200" lvl="1" indent="0">
-              <a:buNone/>
-            </a:pPr>
-            <a:r>
-              <a:rPr lang="en-US" sz="2600" dirty="0">
-                <a:latin typeface="Cascadia Code" panose="020B0609020000020004" pitchFamily="49" charset="0"/>
-                <a:cs typeface="Cascadia Code" panose="020B0609020000020004" pitchFamily="49" charset="0"/>
-              </a:rPr>
-              <a:t>(.Substring </a:t>
-            </a:r>
-            <a:r>
-              <a:rPr lang="en-US" sz="2800" dirty="0">
-                <a:latin typeface="Cascadia Code" panose="020B0609020000020004" pitchFamily="49" charset="0"/>
-                <a:cs typeface="Cascadia Code" panose="020B0609020000020004" pitchFamily="49" charset="0"/>
-              </a:rPr>
-              <a:t>"</a:t>
-            </a:r>
-            <a:r>
-              <a:rPr lang="en-US" sz="2600" dirty="0">
-                <a:latin typeface="Cascadia Code" panose="020B0609020000020004" pitchFamily="49" charset="0"/>
-                <a:cs typeface="Cascadia Code" panose="020B0609020000020004" pitchFamily="49" charset="0"/>
-              </a:rPr>
-              <a:t>hello</a:t>
-            </a:r>
-            <a:r>
-              <a:rPr lang="en-US" sz="2800" dirty="0">
-                <a:latin typeface="Cascadia Code" panose="020B0609020000020004" pitchFamily="49" charset="0"/>
-                <a:cs typeface="Cascadia Code" panose="020B0609020000020004" pitchFamily="49" charset="0"/>
-              </a:rPr>
-              <a:t>"</a:t>
-            </a:r>
-            <a:r>
-              <a:rPr lang="en-US" sz="2600" dirty="0">
-                <a:latin typeface="Cascadia Code" panose="020B0609020000020004" pitchFamily="49" charset="0"/>
-                <a:cs typeface="Cascadia Code" panose="020B0609020000020004" pitchFamily="49" charset="0"/>
-              </a:rPr>
-              <a:t> 2 2</a:t>
-            </a:r>
-            <a:r>
-              <a:rPr lang="en-US" sz="2600">
-                <a:latin typeface="Cascadia Code" panose="020B0609020000020004" pitchFamily="49" charset="0"/>
-                <a:cs typeface="Cascadia Code" panose="020B0609020000020004" pitchFamily="49" charset="0"/>
-              </a:rPr>
-              <a:t>) 	; </a:t>
-            </a:r>
-            <a:r>
-              <a:rPr lang="en-US" sz="2600" dirty="0">
-                <a:latin typeface="Cascadia Code" panose="020B0609020000020004" pitchFamily="49" charset="0"/>
-                <a:cs typeface="Cascadia Code" panose="020B0609020000020004" pitchFamily="49" charset="0"/>
-              </a:rPr>
-              <a:t>returns </a:t>
-            </a:r>
-            <a:r>
-              <a:rPr lang="en-US" sz="2800" dirty="0">
-                <a:solidFill>
-                  <a:schemeClr val="accent1"/>
-                </a:solidFill>
-                <a:latin typeface="Cascadia Code" panose="020B0609020000020004" pitchFamily="49" charset="0"/>
-                <a:cs typeface="Cascadia Code" panose="020B0609020000020004" pitchFamily="49" charset="0"/>
-              </a:rPr>
-              <a:t>"</a:t>
-            </a:r>
-            <a:r>
-              <a:rPr lang="en-US" sz="2600" dirty="0" err="1">
-                <a:latin typeface="Cascadia Code" panose="020B0609020000020004" pitchFamily="49" charset="0"/>
-                <a:cs typeface="Cascadia Code" panose="020B0609020000020004" pitchFamily="49" charset="0"/>
-              </a:rPr>
-              <a:t>ll</a:t>
-            </a:r>
-            <a:r>
-              <a:rPr lang="en-US" sz="2800" dirty="0">
-                <a:solidFill>
-                  <a:schemeClr val="accent1"/>
-                </a:solidFill>
-                <a:latin typeface="Cascadia Code" panose="020B0609020000020004" pitchFamily="49" charset="0"/>
-                <a:cs typeface="Cascadia Code" panose="020B0609020000020004" pitchFamily="49" charset="0"/>
-              </a:rPr>
-              <a:t>"</a:t>
-            </a:r>
-            <a:endParaRPr lang="en-US" sz="2600" dirty="0">
-              <a:latin typeface="Cascadia Code" panose="020B0609020000020004" pitchFamily="49" charset="0"/>
-              <a:cs typeface="Cascadia Code" panose="020B0609020000020004" pitchFamily="49" charset="0"/>
-            </a:endParaRPr>
-          </a:p>
-          <a:p>
-            <a:r>
-              <a:rPr lang="en-US" sz="3900" dirty="0"/>
-              <a:t>So are static members</a:t>
-            </a:r>
-          </a:p>
-          <a:p>
-            <a:pPr marL="457200" lvl="1" indent="0">
-              <a:buNone/>
-            </a:pPr>
-            <a:r>
-              <a:rPr lang="en-US" sz="2600" dirty="0">
-                <a:latin typeface="Cascadia Code" panose="020B0609020000020004" pitchFamily="49" charset="0"/>
-                <a:cs typeface="Cascadia Code" panose="020B0609020000020004" pitchFamily="49" charset="0"/>
-              </a:rPr>
-              <a:t>(.String/Equals "</a:t>
-            </a:r>
-            <a:r>
-              <a:rPr lang="en-US" sz="2600" dirty="0" err="1">
-                <a:latin typeface="Cascadia Code" panose="020B0609020000020004" pitchFamily="49" charset="0"/>
-                <a:cs typeface="Cascadia Code" panose="020B0609020000020004" pitchFamily="49" charset="0"/>
-              </a:rPr>
-              <a:t>abc</a:t>
-            </a:r>
-            <a:r>
-              <a:rPr lang="en-US" sz="2600" dirty="0">
-                <a:latin typeface="Cascadia Code" panose="020B0609020000020004" pitchFamily="49" charset="0"/>
-                <a:cs typeface="Cascadia Code" panose="020B0609020000020004" pitchFamily="49" charset="0"/>
-              </a:rPr>
-              <a:t>" "</a:t>
-            </a:r>
-            <a:r>
-              <a:rPr lang="en-US" sz="2600" dirty="0" err="1">
-                <a:latin typeface="Cascadia Code" panose="020B0609020000020004" pitchFamily="49" charset="0"/>
-                <a:cs typeface="Cascadia Code" panose="020B0609020000020004" pitchFamily="49" charset="0"/>
-              </a:rPr>
-              <a:t>abc</a:t>
-            </a:r>
-            <a:r>
-              <a:rPr lang="en-US" sz="2600" dirty="0">
-                <a:latin typeface="Cascadia Code" panose="020B0609020000020004" pitchFamily="49" charset="0"/>
-                <a:cs typeface="Cascadia Code" panose="020B0609020000020004" pitchFamily="49" charset="0"/>
-              </a:rPr>
-              <a:t>") ; returns true</a:t>
-            </a:r>
-          </a:p>
-          <a:p>
-            <a:pPr marL="457200" lvl="1" indent="0">
-              <a:buNone/>
-            </a:pPr>
-            <a:r>
-              <a:rPr lang="en-US" dirty="0"/>
-              <a:t>		</a:t>
-            </a:r>
-          </a:p>
-        </p:txBody>
-      </p:sp>
-    </p:spTree>
-    <p:extLst>
-      <p:ext uri="{BB962C8B-B14F-4D97-AF65-F5344CB8AC3E}">
-        <p14:creationId xmlns:p14="http://schemas.microsoft.com/office/powerpoint/2010/main" val="2294724065"/>
       </p:ext>
     </p:extLst>
   </p:cSld>
@@ -9166,6 +8914,405 @@
           <p:cNvPr id="2" name="Title 1">
             <a:extLst>
               <a:ext uri="{FF2B5EF4-FFF2-40B4-BE49-F238E27FC236}">
+                <a16:creationId xmlns:a16="http://schemas.microsoft.com/office/drawing/2014/main" id="{C942EC84-F29C-42EA-0185-60E58BF66ACB}"/>
+              </a:ext>
+            </a:extLst>
+          </p:cNvPr>
+          <p:cNvSpPr>
+            <a:spLocks noGrp="1"/>
+          </p:cNvSpPr>
+          <p:nvPr>
+            <p:ph type="title"/>
+          </p:nvPr>
+        </p:nvSpPr>
+        <p:spPr/>
+        <p:txBody>
+          <a:bodyPr>
+            <a:normAutofit/>
+          </a:bodyPr>
+          <a:lstStyle/>
+          <a:p>
+            <a:r>
+              <a:rPr lang="en-US" sz="4000" dirty="0"/>
+              <a:t>Accessing .NET from Braid</a:t>
+            </a:r>
+          </a:p>
+        </p:txBody>
+      </p:sp>
+      <p:sp>
+        <p:nvSpPr>
+          <p:cNvPr id="3" name="Content Placeholder 2">
+            <a:extLst>
+              <a:ext uri="{FF2B5EF4-FFF2-40B4-BE49-F238E27FC236}">
+                <a16:creationId xmlns:a16="http://schemas.microsoft.com/office/drawing/2014/main" id="{5CA2FC57-0920-6942-B057-66EFDAC868AD}"/>
+              </a:ext>
+            </a:extLst>
+          </p:cNvPr>
+          <p:cNvSpPr>
+            <a:spLocks noGrp="1"/>
+          </p:cNvSpPr>
+          <p:nvPr>
+            <p:ph idx="1"/>
+          </p:nvPr>
+        </p:nvSpPr>
+        <p:spPr/>
+        <p:txBody>
+          <a:bodyPr>
+            <a:normAutofit fontScale="92500" lnSpcReduction="10000"/>
+          </a:bodyPr>
+          <a:lstStyle/>
+          <a:p>
+            <a:r>
+              <a:rPr lang="en-US" sz="3900" dirty="0"/>
+              <a:t>Types start with a caret, casts use types like functions</a:t>
+            </a:r>
+          </a:p>
+          <a:p>
+            <a:pPr marL="457200" lvl="1" indent="0">
+              <a:buNone/>
+            </a:pPr>
+            <a:r>
+              <a:rPr lang="en-US" sz="2600" dirty="0">
+                <a:latin typeface="Cascadia Code" panose="020B0609020000020004" pitchFamily="49" charset="0"/>
+                <a:cs typeface="Cascadia Code" panose="020B0609020000020004" pitchFamily="49" charset="0"/>
+              </a:rPr>
+              <a:t>^int ^List[int]</a:t>
+            </a:r>
+          </a:p>
+          <a:p>
+            <a:pPr marL="457200" lvl="1" indent="0">
+              <a:buNone/>
+            </a:pPr>
+            <a:r>
+              <a:rPr lang="en-US" sz="2600" dirty="0">
+                <a:latin typeface="Cascadia Code" panose="020B0609020000020004" pitchFamily="49" charset="0"/>
+                <a:cs typeface="Cascadia Code" panose="020B0609020000020004" pitchFamily="49" charset="0"/>
+              </a:rPr>
+              <a:t>(^int? </a:t>
+            </a:r>
+            <a:r>
+              <a:rPr lang="en-US" sz="2800" dirty="0">
+                <a:latin typeface="Cascadia Code" panose="020B0609020000020004" pitchFamily="49" charset="0"/>
+                <a:cs typeface="Cascadia Code" panose="020B0609020000020004" pitchFamily="49" charset="0"/>
+              </a:rPr>
+              <a:t>"</a:t>
+            </a:r>
+            <a:r>
+              <a:rPr lang="en-US" sz="2600" dirty="0">
+                <a:latin typeface="Cascadia Code" panose="020B0609020000020004" pitchFamily="49" charset="0"/>
+                <a:cs typeface="Cascadia Code" panose="020B0609020000020004" pitchFamily="49" charset="0"/>
+              </a:rPr>
+              <a:t>23</a:t>
+            </a:r>
+            <a:r>
+              <a:rPr lang="en-US" sz="2800" dirty="0">
+                <a:latin typeface="Cascadia Code" panose="020B0609020000020004" pitchFamily="49" charset="0"/>
+                <a:cs typeface="Cascadia Code" panose="020B0609020000020004" pitchFamily="49" charset="0"/>
+              </a:rPr>
+              <a:t>"</a:t>
+            </a:r>
+            <a:r>
+              <a:rPr lang="en-US" sz="2600" dirty="0">
+                <a:latin typeface="Cascadia Code" panose="020B0609020000020004" pitchFamily="49" charset="0"/>
+                <a:cs typeface="Cascadia Code" panose="020B0609020000020004" pitchFamily="49" charset="0"/>
+              </a:rPr>
+              <a:t>)  ; cast string to int</a:t>
+            </a:r>
+          </a:p>
+          <a:p>
+            <a:r>
+              <a:rPr lang="en-US" sz="3900" dirty="0"/>
+              <a:t>Properties and methods are used like functions</a:t>
+            </a:r>
+          </a:p>
+          <a:p>
+            <a:pPr marL="457200" lvl="1" indent="0">
+              <a:buNone/>
+            </a:pPr>
+            <a:r>
+              <a:rPr lang="en-US" sz="2600" dirty="0">
+                <a:latin typeface="Cascadia Code" panose="020B0609020000020004" pitchFamily="49" charset="0"/>
+                <a:cs typeface="Cascadia Code" panose="020B0609020000020004" pitchFamily="49" charset="0"/>
+              </a:rPr>
+              <a:t>(.Length </a:t>
+            </a:r>
+            <a:r>
+              <a:rPr lang="en-US" sz="2800" dirty="0">
+                <a:latin typeface="Cascadia Code" panose="020B0609020000020004" pitchFamily="49" charset="0"/>
+                <a:cs typeface="Cascadia Code" panose="020B0609020000020004" pitchFamily="49" charset="0"/>
+              </a:rPr>
+              <a:t>"</a:t>
+            </a:r>
+            <a:r>
+              <a:rPr lang="en-US" sz="2600" dirty="0" err="1">
+                <a:latin typeface="Cascadia Code" panose="020B0609020000020004" pitchFamily="49" charset="0"/>
+                <a:cs typeface="Cascadia Code" panose="020B0609020000020004" pitchFamily="49" charset="0"/>
+              </a:rPr>
+              <a:t>abc</a:t>
+            </a:r>
+            <a:r>
+              <a:rPr lang="en-US" sz="2800" dirty="0">
+                <a:latin typeface="Cascadia Code" panose="020B0609020000020004" pitchFamily="49" charset="0"/>
+                <a:cs typeface="Cascadia Code" panose="020B0609020000020004" pitchFamily="49" charset="0"/>
+              </a:rPr>
+              <a:t>"</a:t>
+            </a:r>
+            <a:r>
+              <a:rPr lang="en-US" sz="2600" dirty="0">
+                <a:latin typeface="Cascadia Code" panose="020B0609020000020004" pitchFamily="49" charset="0"/>
+                <a:cs typeface="Cascadia Code" panose="020B0609020000020004" pitchFamily="49" charset="0"/>
+              </a:rPr>
+              <a:t>) 			; returns 3</a:t>
+            </a:r>
+          </a:p>
+          <a:p>
+            <a:pPr marL="457200" lvl="1" indent="0">
+              <a:buNone/>
+            </a:pPr>
+            <a:r>
+              <a:rPr lang="en-US" sz="2600" dirty="0">
+                <a:latin typeface="Cascadia Code" panose="020B0609020000020004" pitchFamily="49" charset="0"/>
+                <a:cs typeface="Cascadia Code" panose="020B0609020000020004" pitchFamily="49" charset="0"/>
+              </a:rPr>
+              <a:t>(.Substring </a:t>
+            </a:r>
+            <a:r>
+              <a:rPr lang="en-US" sz="2800" dirty="0">
+                <a:latin typeface="Cascadia Code" panose="020B0609020000020004" pitchFamily="49" charset="0"/>
+                <a:cs typeface="Cascadia Code" panose="020B0609020000020004" pitchFamily="49" charset="0"/>
+              </a:rPr>
+              <a:t>"</a:t>
+            </a:r>
+            <a:r>
+              <a:rPr lang="en-US" sz="2600" dirty="0">
+                <a:latin typeface="Cascadia Code" panose="020B0609020000020004" pitchFamily="49" charset="0"/>
+                <a:cs typeface="Cascadia Code" panose="020B0609020000020004" pitchFamily="49" charset="0"/>
+              </a:rPr>
+              <a:t>hello</a:t>
+            </a:r>
+            <a:r>
+              <a:rPr lang="en-US" sz="2800" dirty="0">
+                <a:latin typeface="Cascadia Code" panose="020B0609020000020004" pitchFamily="49" charset="0"/>
+                <a:cs typeface="Cascadia Code" panose="020B0609020000020004" pitchFamily="49" charset="0"/>
+              </a:rPr>
+              <a:t>"</a:t>
+            </a:r>
+            <a:r>
+              <a:rPr lang="en-US" sz="2600" dirty="0">
+                <a:latin typeface="Cascadia Code" panose="020B0609020000020004" pitchFamily="49" charset="0"/>
+                <a:cs typeface="Cascadia Code" panose="020B0609020000020004" pitchFamily="49" charset="0"/>
+              </a:rPr>
+              <a:t> 1) 	; returns </a:t>
+            </a:r>
+            <a:r>
+              <a:rPr lang="en-US" sz="2800" dirty="0">
+                <a:solidFill>
+                  <a:schemeClr val="accent1"/>
+                </a:solidFill>
+                <a:latin typeface="Cascadia Code" panose="020B0609020000020004" pitchFamily="49" charset="0"/>
+                <a:cs typeface="Cascadia Code" panose="020B0609020000020004" pitchFamily="49" charset="0"/>
+              </a:rPr>
+              <a:t>"</a:t>
+            </a:r>
+            <a:r>
+              <a:rPr lang="en-US" sz="2600" dirty="0" err="1">
+                <a:latin typeface="Cascadia Code" panose="020B0609020000020004" pitchFamily="49" charset="0"/>
+                <a:cs typeface="Cascadia Code" panose="020B0609020000020004" pitchFamily="49" charset="0"/>
+              </a:rPr>
+              <a:t>ello</a:t>
+            </a:r>
+            <a:r>
+              <a:rPr lang="en-US" sz="2800" dirty="0">
+                <a:solidFill>
+                  <a:schemeClr val="accent1"/>
+                </a:solidFill>
+                <a:latin typeface="Cascadia Code" panose="020B0609020000020004" pitchFamily="49" charset="0"/>
+                <a:cs typeface="Cascadia Code" panose="020B0609020000020004" pitchFamily="49" charset="0"/>
+              </a:rPr>
+              <a:t>"</a:t>
+            </a:r>
+            <a:endParaRPr lang="en-US" sz="2600" dirty="0">
+              <a:latin typeface="Cascadia Code" panose="020B0609020000020004" pitchFamily="49" charset="0"/>
+              <a:cs typeface="Cascadia Code" panose="020B0609020000020004" pitchFamily="49" charset="0"/>
+            </a:endParaRPr>
+          </a:p>
+          <a:p>
+            <a:pPr marL="457200" lvl="1" indent="0">
+              <a:buNone/>
+            </a:pPr>
+            <a:r>
+              <a:rPr lang="en-US" sz="2600" dirty="0">
+                <a:latin typeface="Cascadia Code" panose="020B0609020000020004" pitchFamily="49" charset="0"/>
+                <a:cs typeface="Cascadia Code" panose="020B0609020000020004" pitchFamily="49" charset="0"/>
+              </a:rPr>
+              <a:t>(.Substring </a:t>
+            </a:r>
+            <a:r>
+              <a:rPr lang="en-US" sz="2800" dirty="0">
+                <a:latin typeface="Cascadia Code" panose="020B0609020000020004" pitchFamily="49" charset="0"/>
+                <a:cs typeface="Cascadia Code" panose="020B0609020000020004" pitchFamily="49" charset="0"/>
+              </a:rPr>
+              <a:t>"</a:t>
+            </a:r>
+            <a:r>
+              <a:rPr lang="en-US" sz="2600" dirty="0">
+                <a:latin typeface="Cascadia Code" panose="020B0609020000020004" pitchFamily="49" charset="0"/>
+                <a:cs typeface="Cascadia Code" panose="020B0609020000020004" pitchFamily="49" charset="0"/>
+              </a:rPr>
+              <a:t>hello</a:t>
+            </a:r>
+            <a:r>
+              <a:rPr lang="en-US" sz="2800" dirty="0">
+                <a:latin typeface="Cascadia Code" panose="020B0609020000020004" pitchFamily="49" charset="0"/>
+                <a:cs typeface="Cascadia Code" panose="020B0609020000020004" pitchFamily="49" charset="0"/>
+              </a:rPr>
+              <a:t>"</a:t>
+            </a:r>
+            <a:r>
+              <a:rPr lang="en-US" sz="2600" dirty="0">
+                <a:latin typeface="Cascadia Code" panose="020B0609020000020004" pitchFamily="49" charset="0"/>
+                <a:cs typeface="Cascadia Code" panose="020B0609020000020004" pitchFamily="49" charset="0"/>
+              </a:rPr>
+              <a:t> 2 2</a:t>
+            </a:r>
+            <a:r>
+              <a:rPr lang="en-US" sz="2600">
+                <a:latin typeface="Cascadia Code" panose="020B0609020000020004" pitchFamily="49" charset="0"/>
+                <a:cs typeface="Cascadia Code" panose="020B0609020000020004" pitchFamily="49" charset="0"/>
+              </a:rPr>
+              <a:t>) 	; </a:t>
+            </a:r>
+            <a:r>
+              <a:rPr lang="en-US" sz="2600" dirty="0">
+                <a:latin typeface="Cascadia Code" panose="020B0609020000020004" pitchFamily="49" charset="0"/>
+                <a:cs typeface="Cascadia Code" panose="020B0609020000020004" pitchFamily="49" charset="0"/>
+              </a:rPr>
+              <a:t>returns </a:t>
+            </a:r>
+            <a:r>
+              <a:rPr lang="en-US" sz="2800" dirty="0">
+                <a:solidFill>
+                  <a:schemeClr val="accent1"/>
+                </a:solidFill>
+                <a:latin typeface="Cascadia Code" panose="020B0609020000020004" pitchFamily="49" charset="0"/>
+                <a:cs typeface="Cascadia Code" panose="020B0609020000020004" pitchFamily="49" charset="0"/>
+              </a:rPr>
+              <a:t>"</a:t>
+            </a:r>
+            <a:r>
+              <a:rPr lang="en-US" sz="2600" dirty="0" err="1">
+                <a:latin typeface="Cascadia Code" panose="020B0609020000020004" pitchFamily="49" charset="0"/>
+                <a:cs typeface="Cascadia Code" panose="020B0609020000020004" pitchFamily="49" charset="0"/>
+              </a:rPr>
+              <a:t>ll</a:t>
+            </a:r>
+            <a:r>
+              <a:rPr lang="en-US" sz="2800" dirty="0">
+                <a:solidFill>
+                  <a:schemeClr val="accent1"/>
+                </a:solidFill>
+                <a:latin typeface="Cascadia Code" panose="020B0609020000020004" pitchFamily="49" charset="0"/>
+                <a:cs typeface="Cascadia Code" panose="020B0609020000020004" pitchFamily="49" charset="0"/>
+              </a:rPr>
+              <a:t>"</a:t>
+            </a:r>
+            <a:endParaRPr lang="en-US" sz="2600" dirty="0">
+              <a:latin typeface="Cascadia Code" panose="020B0609020000020004" pitchFamily="49" charset="0"/>
+              <a:cs typeface="Cascadia Code" panose="020B0609020000020004" pitchFamily="49" charset="0"/>
+            </a:endParaRPr>
+          </a:p>
+          <a:p>
+            <a:r>
+              <a:rPr lang="en-US" sz="3900" dirty="0"/>
+              <a:t>So are static members</a:t>
+            </a:r>
+          </a:p>
+          <a:p>
+            <a:pPr marL="457200" lvl="1" indent="0">
+              <a:buNone/>
+            </a:pPr>
+            <a:r>
+              <a:rPr lang="en-US" sz="2600" dirty="0">
+                <a:latin typeface="Cascadia Code" panose="020B0609020000020004" pitchFamily="49" charset="0"/>
+                <a:cs typeface="Cascadia Code" panose="020B0609020000020004" pitchFamily="49" charset="0"/>
+              </a:rPr>
+              <a:t>(.String/Equals "</a:t>
+            </a:r>
+            <a:r>
+              <a:rPr lang="en-US" sz="2600" dirty="0" err="1">
+                <a:latin typeface="Cascadia Code" panose="020B0609020000020004" pitchFamily="49" charset="0"/>
+                <a:cs typeface="Cascadia Code" panose="020B0609020000020004" pitchFamily="49" charset="0"/>
+              </a:rPr>
+              <a:t>abc</a:t>
+            </a:r>
+            <a:r>
+              <a:rPr lang="en-US" sz="2600" dirty="0">
+                <a:latin typeface="Cascadia Code" panose="020B0609020000020004" pitchFamily="49" charset="0"/>
+                <a:cs typeface="Cascadia Code" panose="020B0609020000020004" pitchFamily="49" charset="0"/>
+              </a:rPr>
+              <a:t>" "</a:t>
+            </a:r>
+            <a:r>
+              <a:rPr lang="en-US" sz="2600" dirty="0" err="1">
+                <a:latin typeface="Cascadia Code" panose="020B0609020000020004" pitchFamily="49" charset="0"/>
+                <a:cs typeface="Cascadia Code" panose="020B0609020000020004" pitchFamily="49" charset="0"/>
+              </a:rPr>
+              <a:t>abc</a:t>
+            </a:r>
+            <a:r>
+              <a:rPr lang="en-US" sz="2600" dirty="0">
+                <a:latin typeface="Cascadia Code" panose="020B0609020000020004" pitchFamily="49" charset="0"/>
+                <a:cs typeface="Cascadia Code" panose="020B0609020000020004" pitchFamily="49" charset="0"/>
+              </a:rPr>
+              <a:t>") ; returns true</a:t>
+            </a:r>
+          </a:p>
+          <a:p>
+            <a:pPr marL="457200" lvl="1" indent="0">
+              <a:buNone/>
+            </a:pPr>
+            <a:r>
+              <a:rPr lang="en-US" dirty="0"/>
+              <a:t>		</a:t>
+            </a:r>
+          </a:p>
+        </p:txBody>
+      </p:sp>
+    </p:spTree>
+    <p:extLst>
+      <p:ext uri="{BB962C8B-B14F-4D97-AF65-F5344CB8AC3E}">
+        <p14:creationId xmlns:p14="http://schemas.microsoft.com/office/powerpoint/2010/main" val="2294724065"/>
+      </p:ext>
+    </p:extLst>
+  </p:cSld>
+  <p:clrMapOvr>
+    <a:masterClrMapping/>
+  </p:clrMapOvr>
+</p:sld>
+</file>
+
+<file path=ppt/slides/slide21.xml><?xml version="1.0" encoding="utf-8"?>
+<p:sld xmlns:a="http://schemas.openxmlformats.org/drawingml/2006/main" xmlns:r="http://schemas.openxmlformats.org/officeDocument/2006/relationships" xmlns:p="http://schemas.openxmlformats.org/presentationml/2006/main">
+  <p:cSld>
+    <p:spTree>
+      <p:nvGrpSpPr>
+        <p:cNvPr id="1" name=""/>
+        <p:cNvGrpSpPr/>
+        <p:nvPr/>
+      </p:nvGrpSpPr>
+      <p:grpSpPr>
+        <a:xfrm>
+          <a:off x="0" y="0"/>
+          <a:ext cx="0" cy="0"/>
+          <a:chOff x="0" y="0"/>
+          <a:chExt cx="0" cy="0"/>
+        </a:xfrm>
+      </p:grpSpPr>
+      <p:sp>
+        <p:nvSpPr>
+          <p:cNvPr id="2" name="Title 1">
+            <a:extLst>
+              <a:ext uri="{FF2B5EF4-FFF2-40B4-BE49-F238E27FC236}">
                 <a16:creationId xmlns:a16="http://schemas.microsoft.com/office/drawing/2014/main" id="{9FEC7413-8166-9F9D-711A-EB303FFD92C6}"/>
               </a:ext>
             </a:extLst>
@@ -9289,7 +9436,7 @@
 </p:sld>
 </file>
 
-<file path=ppt/slides/slide21.xml><?xml version="1.0" encoding="utf-8"?>
+<file path=ppt/slides/slide22.xml><?xml version="1.0" encoding="utf-8"?>
 <p:sld xmlns:a="http://schemas.openxmlformats.org/drawingml/2006/main" xmlns:r="http://schemas.openxmlformats.org/officeDocument/2006/relationships" xmlns:p="http://schemas.openxmlformats.org/presentationml/2006/main">
   <p:cSld>
     <p:spTree>
@@ -9468,7 +9615,7 @@
 </p:sld>
 </file>
 
-<file path=ppt/slides/slide22.xml><?xml version="1.0" encoding="utf-8"?>
+<file path=ppt/slides/slide23.xml><?xml version="1.0" encoding="utf-8"?>
 <p:sld xmlns:a="http://schemas.openxmlformats.org/drawingml/2006/main" xmlns:r="http://schemas.openxmlformats.org/officeDocument/2006/relationships" xmlns:p="http://schemas.openxmlformats.org/presentationml/2006/main">
   <p:cSld>
     <p:spTree>
@@ -9762,7 +9909,7 @@
 </p:sld>
 </file>
 
-<file path=ppt/slides/slide23.xml><?xml version="1.0" encoding="utf-8"?>
+<file path=ppt/slides/slide24.xml><?xml version="1.0" encoding="utf-8"?>
 <p:sld xmlns:a="http://schemas.openxmlformats.org/drawingml/2006/main" xmlns:r="http://schemas.openxmlformats.org/officeDocument/2006/relationships" xmlns:p="http://schemas.openxmlformats.org/presentationml/2006/main">
   <p:cSld>
     <p:spTree>
@@ -10081,7 +10228,7 @@
 </p:sld>
 </file>
 
-<file path=ppt/slides/slide24.xml><?xml version="1.0" encoding="utf-8"?>
+<file path=ppt/slides/slide25.xml><?xml version="1.0" encoding="utf-8"?>
 <p:sld xmlns:a="http://schemas.openxmlformats.org/drawingml/2006/main" xmlns:r="http://schemas.openxmlformats.org/officeDocument/2006/relationships" xmlns:p="http://schemas.openxmlformats.org/presentationml/2006/main">
   <p:cSld>
     <p:spTree>
@@ -10217,7 +10364,7 @@
 </p:sld>
 </file>
 
-<file path=ppt/slides/slide25.xml><?xml version="1.0" encoding="utf-8"?>
+<file path=ppt/slides/slide26.xml><?xml version="1.0" encoding="utf-8"?>
 <p:sld xmlns:a="http://schemas.openxmlformats.org/drawingml/2006/main" xmlns:r="http://schemas.openxmlformats.org/officeDocument/2006/relationships" xmlns:p="http://schemas.openxmlformats.org/presentationml/2006/main">
   <p:cSld>
     <p:spTree>
@@ -10345,7 +10492,7 @@
 </p:sld>
 </file>
 
-<file path=ppt/slides/slide26.xml><?xml version="1.0" encoding="utf-8"?>
+<file path=ppt/slides/slide27.xml><?xml version="1.0" encoding="utf-8"?>
 <p:sld xmlns:a="http://schemas.openxmlformats.org/drawingml/2006/main" xmlns:r="http://schemas.openxmlformats.org/officeDocument/2006/relationships" xmlns:p="http://schemas.openxmlformats.org/presentationml/2006/main">
   <p:cSld>
     <p:spTree>
@@ -10439,7 +10586,7 @@
 </p:sld>
 </file>
 
-<file path=ppt/slides/slide27.xml><?xml version="1.0" encoding="utf-8"?>
+<file path=ppt/slides/slide28.xml><?xml version="1.0" encoding="utf-8"?>
 <p:sld xmlns:a="http://schemas.openxmlformats.org/drawingml/2006/main" xmlns:r="http://schemas.openxmlformats.org/officeDocument/2006/relationships" xmlns:p="http://schemas.openxmlformats.org/presentationml/2006/main">
   <p:cSld>
     <p:spTree>
@@ -10780,7 +10927,7 @@
 </p:sld>
 </file>
 
-<file path=ppt/slides/slide28.xml><?xml version="1.0" encoding="utf-8"?>
+<file path=ppt/slides/slide29.xml><?xml version="1.0" encoding="utf-8"?>
 <p:sld xmlns:a="http://schemas.openxmlformats.org/drawingml/2006/main" xmlns:r="http://schemas.openxmlformats.org/officeDocument/2006/relationships" xmlns:p="http://schemas.openxmlformats.org/presentationml/2006/main">
   <p:cSld>
     <p:spTree>
@@ -14056,6 +14203,26 @@
 </file>
 
 <file path=customXml/item1.xml><?xml version="1.0" encoding="utf-8"?>
+<?mso-contentType ?>
+<FormTemplates xmlns="http://schemas.microsoft.com/sharepoint/v3/contenttype/forms">
+  <Display>DocumentLibraryForm</Display>
+  <Edit>DocumentLibraryForm</Edit>
+  <New>DocumentLibraryForm</New>
+</FormTemplates>
+</file>
+
+<file path=customXml/item2.xml><?xml version="1.0" encoding="utf-8"?>
+<p:properties xmlns:p="http://schemas.microsoft.com/office/2006/metadata/properties" xmlns:xsi="http://www.w3.org/2001/XMLSchema-instance" xmlns:pc="http://schemas.microsoft.com/office/infopath/2007/PartnerControls">
+  <documentManagement>
+    <lcf76f155ced4ddcb4097134ff3c332f xmlns="abdc9a1f-962e-4235-838d-61f9c438f4db">
+      <Terms xmlns="http://schemas.microsoft.com/office/infopath/2007/PartnerControls"/>
+    </lcf76f155ced4ddcb4097134ff3c332f>
+    <TaxCatchAll xmlns="de47e97d-64fd-4aef-b10e-fd7d6cfcfcf4" xsi:nil="true"/>
+  </documentManagement>
+</p:properties>
+</file>
+
+<file path=customXml/item3.xml><?xml version="1.0" encoding="utf-8"?>
 <ct:contentTypeSchema xmlns:ct="http://schemas.microsoft.com/office/2006/metadata/contentType" xmlns:ma="http://schemas.microsoft.com/office/2006/metadata/properties/metaAttributes" ct:_="" ma:_="" ma:contentTypeName="Document" ma:contentTypeID="0x010100333502FDC476714EB47BD1BE2BFD7B3D" ma:contentTypeVersion="13" ma:contentTypeDescription="Create a new document." ma:contentTypeScope="" ma:versionID="0d4fb5ca5076182280cb93c7d6bdff79">
   <xsd:schema xmlns:xsd="http://www.w3.org/2001/XMLSchema" xmlns:xs="http://www.w3.org/2001/XMLSchema" xmlns:p="http://schemas.microsoft.com/office/2006/metadata/properties" xmlns:ns2="abdc9a1f-962e-4235-838d-61f9c438f4db" xmlns:ns3="de47e97d-64fd-4aef-b10e-fd7d6cfcfcf4" targetNamespace="http://schemas.microsoft.com/office/2006/metadata/properties" ma:root="true" ma:fieldsID="da14a0effa8c0f0120811d0692d695e7" ns2:_="" ns3:_="">
     <xsd:import namespace="abdc9a1f-962e-4235-838d-61f9c438f4db"/>
@@ -14262,41 +14429,10 @@
 </ct:contentTypeSchema>
 </file>
 
-<file path=customXml/item2.xml><?xml version="1.0" encoding="utf-8"?>
-<p:properties xmlns:p="http://schemas.microsoft.com/office/2006/metadata/properties" xmlns:xsi="http://www.w3.org/2001/XMLSchema-instance" xmlns:pc="http://schemas.microsoft.com/office/infopath/2007/PartnerControls">
-  <documentManagement>
-    <lcf76f155ced4ddcb4097134ff3c332f xmlns="abdc9a1f-962e-4235-838d-61f9c438f4db">
-      <Terms xmlns="http://schemas.microsoft.com/office/infopath/2007/PartnerControls"/>
-    </lcf76f155ced4ddcb4097134ff3c332f>
-    <TaxCatchAll xmlns="de47e97d-64fd-4aef-b10e-fd7d6cfcfcf4" xsi:nil="true"/>
-  </documentManagement>
-</p:properties>
-</file>
-
-<file path=customXml/item3.xml><?xml version="1.0" encoding="utf-8"?>
-<?mso-contentType ?>
-<FormTemplates xmlns="http://schemas.microsoft.com/sharepoint/v3/contenttype/forms">
-  <Display>DocumentLibraryForm</Display>
-  <Edit>DocumentLibraryForm</Edit>
-  <New>DocumentLibraryForm</New>
-</FormTemplates>
-</file>
-
 <file path=customXml/itemProps1.xml><?xml version="1.0" encoding="utf-8"?>
-<ds:datastoreItem xmlns:ds="http://schemas.openxmlformats.org/officeDocument/2006/customXml" ds:itemID="{2C38D965-436F-4DCC-97AA-50BEF4F7BE29}">
+<ds:datastoreItem xmlns:ds="http://schemas.openxmlformats.org/officeDocument/2006/customXml" ds:itemID="{57D9B22B-F436-4FE5-B6C0-65AB2260F593}">
   <ds:schemaRefs>
-    <ds:schemaRef ds:uri="abdc9a1f-962e-4235-838d-61f9c438f4db"/>
-    <ds:schemaRef ds:uri="de47e97d-64fd-4aef-b10e-fd7d6cfcfcf4"/>
-    <ds:schemaRef ds:uri="http://purl.org/dc/elements/1.1/"/>
-    <ds:schemaRef ds:uri="http://purl.org/dc/terms/"/>
-    <ds:schemaRef ds:uri="http://schemas.microsoft.com/internal/obd"/>
-    <ds:schemaRef ds:uri="http://schemas.microsoft.com/office/2006/documentManagement/types"/>
-    <ds:schemaRef ds:uri="http://schemas.microsoft.com/office/2006/metadata/contentType"/>
-    <ds:schemaRef ds:uri="http://schemas.microsoft.com/office/2006/metadata/properties"/>
-    <ds:schemaRef ds:uri="http://schemas.microsoft.com/office/2006/metadata/properties/metaAttributes"/>
-    <ds:schemaRef ds:uri="http://schemas.microsoft.com/office/infopath/2007/PartnerControls"/>
-    <ds:schemaRef ds:uri="http://schemas.openxmlformats.org/package/2006/metadata/core-properties"/>
-    <ds:schemaRef ds:uri="http://www.w3.org/2001/XMLSchema"/>
+    <ds:schemaRef ds:uri="http://schemas.microsoft.com/sharepoint/v3/contenttype/forms"/>
   </ds:schemaRefs>
 </ds:datastoreItem>
 </file>
@@ -14317,9 +14453,20 @@
 </file>
 
 <file path=customXml/itemProps3.xml><?xml version="1.0" encoding="utf-8"?>
-<ds:datastoreItem xmlns:ds="http://schemas.openxmlformats.org/officeDocument/2006/customXml" ds:itemID="{57D9B22B-F436-4FE5-B6C0-65AB2260F593}">
+<ds:datastoreItem xmlns:ds="http://schemas.openxmlformats.org/officeDocument/2006/customXml" ds:itemID="{2C38D965-436F-4DCC-97AA-50BEF4F7BE29}">
   <ds:schemaRefs>
-    <ds:schemaRef ds:uri="http://schemas.microsoft.com/sharepoint/v3/contenttype/forms"/>
+    <ds:schemaRef ds:uri="abdc9a1f-962e-4235-838d-61f9c438f4db"/>
+    <ds:schemaRef ds:uri="de47e97d-64fd-4aef-b10e-fd7d6cfcfcf4"/>
+    <ds:schemaRef ds:uri="http://purl.org/dc/elements/1.1/"/>
+    <ds:schemaRef ds:uri="http://purl.org/dc/terms/"/>
+    <ds:schemaRef ds:uri="http://schemas.microsoft.com/internal/obd"/>
+    <ds:schemaRef ds:uri="http://schemas.microsoft.com/office/2006/documentManagement/types"/>
+    <ds:schemaRef ds:uri="http://schemas.microsoft.com/office/2006/metadata/contentType"/>
+    <ds:schemaRef ds:uri="http://schemas.microsoft.com/office/2006/metadata/properties"/>
+    <ds:schemaRef ds:uri="http://schemas.microsoft.com/office/2006/metadata/properties/metaAttributes"/>
+    <ds:schemaRef ds:uri="http://schemas.microsoft.com/office/infopath/2007/PartnerControls"/>
+    <ds:schemaRef ds:uri="http://schemas.openxmlformats.org/package/2006/metadata/core-properties"/>
+    <ds:schemaRef ds:uri="http://www.w3.org/2001/XMLSchema"/>
   </ds:schemaRefs>
 </ds:datastoreItem>
 </file>